--- a/report and presentation/Synkro_PFA_Defense.pptx
+++ b/report and presentation/Synkro_PFA_Defense.pptx
@@ -4,6 +4,9 @@
   <p:sldMasterIdLst>
     <p:sldMasterId id="2147483648" r:id="rId1"/>
   </p:sldMasterIdLst>
+  <p:notesMasterIdLst>
+    <p:notesMasterId r:id="rId21"/>
+  </p:notesMasterIdLst>
   <p:sldIdLst>
     <p:sldId id="256" r:id="rId2"/>
     <p:sldId id="257" r:id="rId3"/>
@@ -25,9 +28,6 @@
     <p:sldId id="273" r:id="rId19"/>
     <p:sldId id="274" r:id="rId20"/>
   </p:sldIdLst>
-  <p:notesMasterIdLst>
-    <p:notesMasterId r:id="rId21"/>
-  </p:notesMasterIdLst>
   <p:sldSz cx="12192000" cy="6858000"/>
   <p:notesSz cx="6858000" cy="12192000"/>
   <p:defaultTextStyle>
@@ -122,6 +122,11 @@
       </a:defRPr>
     </a:lvl9pPr>
   </p:defaultTextStyle>
+  <p:extLst>
+    <p:ext uri="{EFAFB233-063F-42B5-8137-9DF3F51BA10A}">
+      <p15:sldGuideLst xmlns:p15="http://schemas.microsoft.com/office/powerpoint/2012/main"/>
+    </p:ext>
+  </p:extLst>
 </p:presentation>
 </file>
 
@@ -147,234 +152,10 @@
           <a:chExt cx="0" cy="0"/>
         </a:xfrm>
       </p:grpSpPr>
-      <p:sp>
-        <p:nvSpPr>
-          <p:cNvPr id="2" name="Header Placeholder 1"/>
-          <p:cNvSpPr>
-            <a:spLocks noGrp="1"/>
-          </p:cNvSpPr>
-          <p:nvPr>
-            <p:ph type="hdr" sz="quarter"/>
-          </p:nvPr>
-        </p:nvSpPr>
-        <p:spPr>
-          <a:xfrm>
-            <a:off x="0" y="0"/>
-            <a:ext cx="2971800" cy="458788"/>
-          </a:xfrm>
-          <a:prstGeom prst="rect">
-            <a:avLst/>
-          </a:prstGeom>
-        </p:spPr>
-        <p:txBody>
-          <a:bodyPr vert="horz" lIns="91440" tIns="45720" rIns="91440" bIns="45720" rtlCol="0"/>
-          <a:lstStyle>
-            <a:lvl1pPr algn="l">
-              <a:defRPr sz="1200"/>
-            </a:lvl1pPr>
-          </a:lstStyle>
-          <a:p>
-            <a:endParaRPr lang="en-US"/>
-          </a:p>
-        </p:txBody>
-      </p:sp>
-      <p:sp>
-        <p:nvSpPr>
-          <p:cNvPr id="3" name="Date Placeholder 2"/>
-          <p:cNvSpPr>
-            <a:spLocks noGrp="1"/>
-          </p:cNvSpPr>
-          <p:nvPr>
-            <p:ph type="dt" idx="1"/>
-          </p:nvPr>
-        </p:nvSpPr>
-        <p:spPr>
-          <a:xfrm>
-            <a:off x="3884613" y="0"/>
-            <a:ext cx="2971800" cy="458788"/>
-          </a:xfrm>
-          <a:prstGeom prst="rect">
-            <a:avLst/>
-          </a:prstGeom>
-        </p:spPr>
-        <p:txBody>
-          <a:bodyPr vert="horz" lIns="91440" tIns="45720" rIns="91440" bIns="45720" rtlCol="0"/>
-          <a:lstStyle>
-            <a:lvl1pPr algn="r">
-              <a:defRPr sz="1200"/>
-            </a:lvl1pPr>
-          </a:lstStyle>
-          <a:p>
-            <a:fld id="{5282F153-3F37-0F45-9E97-73ACFA13230C}" type="datetimeFigureOut">
-              <a:rPr lang="en-US"/>
-              <a:t>7/23/19</a:t>
-            </a:fld>
-            <a:endParaRPr lang="en-US"/>
-          </a:p>
-        </p:txBody>
-      </p:sp>
-      <p:sp>
-        <p:nvSpPr>
-          <p:cNvPr id="4" name="Slide Image Placeholder 3"/>
-          <p:cNvSpPr>
-            <a:spLocks noGrp="1" noRot="1" noChangeAspect="1"/>
-          </p:cNvSpPr>
-          <p:nvPr>
-            <p:ph type="sldImg" idx="2"/>
-          </p:nvPr>
-        </p:nvSpPr>
-        <p:spPr>
-          <a:xfrm>
-            <a:off x="685800" y="1143000"/>
-            <a:ext cx="5486400" cy="3086100"/>
-          </a:xfrm>
-          <a:prstGeom prst="rect">
-            <a:avLst/>
-          </a:prstGeom>
-          <a:noFill/>
-          <a:ln w="12700">
-            <a:solidFill>
-              <a:prstClr val="black"/>
-            </a:solidFill>
-          </a:ln>
-        </p:spPr>
-        <p:txBody>
-          <a:bodyPr vert="horz" lIns="91440" tIns="45720" rIns="91440" bIns="45720" rtlCol="0" anchor="ctr"/>
-          <a:lstStyle/>
-          <a:p>
-            <a:endParaRPr lang="en-US"/>
-          </a:p>
-        </p:txBody>
-      </p:sp>
-      <p:sp>
-        <p:nvSpPr>
-          <p:cNvPr id="5" name="Notes Placeholder 4"/>
-          <p:cNvSpPr>
-            <a:spLocks noGrp="1"/>
-          </p:cNvSpPr>
-          <p:nvPr>
-            <p:ph type="body" sz="quarter" idx="3"/>
-          </p:nvPr>
-        </p:nvSpPr>
-        <p:spPr>
-          <a:xfrm>
-            <a:off x="685800" y="4400550"/>
-            <a:ext cx="5486400" cy="3600450"/>
-          </a:xfrm>
-          <a:prstGeom prst="rect">
-            <a:avLst/>
-          </a:prstGeom>
-        </p:spPr>
-        <p:txBody>
-          <a:bodyPr vert="horz" lIns="91440" tIns="45720" rIns="91440" bIns="45720" rtlCol="0"/>
-          <a:lstStyle/>
-          <a:p>
-            <a:pPr lvl="0"/>
-            <a:r>
-              <a:rPr lang="en-US"/>
-              <a:t>Click to edit Master text styles</a:t>
-            </a:r>
-          </a:p>
-          <a:p>
-            <a:pPr lvl="1"/>
-            <a:r>
-              <a:rPr lang="en-US"/>
-              <a:t>Second level</a:t>
-            </a:r>
-          </a:p>
-          <a:p>
-            <a:pPr lvl="2"/>
-            <a:r>
-              <a:rPr lang="en-US"/>
-              <a:t>Third level</a:t>
-            </a:r>
-          </a:p>
-          <a:p>
-            <a:pPr lvl="3"/>
-            <a:r>
-              <a:rPr lang="en-US"/>
-              <a:t>Fourth level</a:t>
-            </a:r>
-          </a:p>
-          <a:p>
-            <a:pPr lvl="4"/>
-            <a:r>
-              <a:rPr lang="en-US"/>
-              <a:t>Fifth level</a:t>
-            </a:r>
-          </a:p>
-        </p:txBody>
-      </p:sp>
-      <p:sp>
-        <p:nvSpPr>
-          <p:cNvPr id="6" name="Footer Placeholder 5"/>
-          <p:cNvSpPr>
-            <a:spLocks noGrp="1"/>
-          </p:cNvSpPr>
-          <p:nvPr>
-            <p:ph type="ftr" sz="quarter" idx="4"/>
-          </p:nvPr>
-        </p:nvSpPr>
-        <p:spPr>
-          <a:xfrm>
-            <a:off x="0" y="8685213"/>
-            <a:ext cx="2971800" cy="458787"/>
-          </a:xfrm>
-          <a:prstGeom prst="rect">
-            <a:avLst/>
-          </a:prstGeom>
-        </p:spPr>
-        <p:txBody>
-          <a:bodyPr vert="horz" lIns="91440" tIns="45720" rIns="91440" bIns="45720" rtlCol="0" anchor="b"/>
-          <a:lstStyle>
-            <a:lvl1pPr algn="l">
-              <a:defRPr sz="1200"/>
-            </a:lvl1pPr>
-          </a:lstStyle>
-          <a:p>
-            <a:endParaRPr lang="en-US"/>
-          </a:p>
-        </p:txBody>
-      </p:sp>
-      <p:sp>
-        <p:nvSpPr>
-          <p:cNvPr id="7" name="Slide Number Placeholder 6"/>
-          <p:cNvSpPr>
-            <a:spLocks noGrp="1"/>
-          </p:cNvSpPr>
-          <p:nvPr>
-            <p:ph type="sldNum" sz="quarter" idx="5"/>
-          </p:nvPr>
-        </p:nvSpPr>
-        <p:spPr>
-          <a:xfrm>
-            <a:off x="3884613" y="8685213"/>
-            <a:ext cx="2971800" cy="458787"/>
-          </a:xfrm>
-          <a:prstGeom prst="rect">
-            <a:avLst/>
-          </a:prstGeom>
-        </p:spPr>
-        <p:txBody>
-          <a:bodyPr vert="horz" lIns="91440" tIns="45720" rIns="91440" bIns="45720" rtlCol="0" anchor="b"/>
-          <a:lstStyle>
-            <a:lvl1pPr algn="r">
-              <a:defRPr sz="1200"/>
-            </a:lvl1pPr>
-          </a:lstStyle>
-          <a:p>
-            <a:fld id="{CE5E9CC1-C706-0F49-92D6-E571CC5EEA8F}" type="slidenum">
-              <a:rPr lang="en-US"/>
-              <a:t>‹#›</a:t>
-            </a:fld>
-            <a:endParaRPr lang="en-US"/>
-          </a:p>
-        </p:txBody>
-      </p:sp>
     </p:spTree>
     <p:extLst>
       <p:ext uri="{BB962C8B-B14F-4D97-AF65-F5344CB8AC3E}">
-        <p14:creationId xmlns:p14="http://schemas.microsoft.com/office/powerpoint/2010/main" val="1024086991"/>
+        <p14:creationId xmlns:p14="http://schemas.microsoft.com/office/powerpoint/2010/main" val="237735097"/>
       </p:ext>
     </p:extLst>
   </p:cSld>
@@ -518,10 +299,6 @@
           <a:bodyPr/>
           <a:lstStyle/>
           <a:p>
-            <a:r>
-              <a:rPr lang="en-US" dirty="0"/>
-              <a:t/>
-            </a:r>
             <a:endParaRPr lang="en-US" dirty="0"/>
           </a:p>
         </p:txBody>
@@ -606,10 +383,6 @@
           <a:bodyPr/>
           <a:lstStyle/>
           <a:p>
-            <a:r>
-              <a:rPr lang="en-US" dirty="0"/>
-              <a:t/>
-            </a:r>
             <a:endParaRPr lang="en-US" dirty="0"/>
           </a:p>
         </p:txBody>
@@ -694,10 +467,6 @@
           <a:bodyPr/>
           <a:lstStyle/>
           <a:p>
-            <a:r>
-              <a:rPr lang="en-US" dirty="0"/>
-              <a:t/>
-            </a:r>
             <a:endParaRPr lang="en-US" dirty="0"/>
           </a:p>
         </p:txBody>
@@ -782,10 +551,6 @@
           <a:bodyPr/>
           <a:lstStyle/>
           <a:p>
-            <a:r>
-              <a:rPr lang="en-US" dirty="0"/>
-              <a:t/>
-            </a:r>
             <a:endParaRPr lang="en-US" dirty="0"/>
           </a:p>
         </p:txBody>
@@ -870,10 +635,6 @@
           <a:bodyPr/>
           <a:lstStyle/>
           <a:p>
-            <a:r>
-              <a:rPr lang="en-US" dirty="0"/>
-              <a:t/>
-            </a:r>
             <a:endParaRPr lang="en-US" dirty="0"/>
           </a:p>
         </p:txBody>
@@ -958,10 +719,6 @@
           <a:bodyPr/>
           <a:lstStyle/>
           <a:p>
-            <a:r>
-              <a:rPr lang="en-US" dirty="0"/>
-              <a:t/>
-            </a:r>
             <a:endParaRPr lang="en-US" dirty="0"/>
           </a:p>
         </p:txBody>
@@ -1046,10 +803,6 @@
           <a:bodyPr/>
           <a:lstStyle/>
           <a:p>
-            <a:r>
-              <a:rPr lang="en-US" dirty="0"/>
-              <a:t/>
-            </a:r>
             <a:endParaRPr lang="en-US" dirty="0"/>
           </a:p>
         </p:txBody>
@@ -1134,10 +887,6 @@
           <a:bodyPr/>
           <a:lstStyle/>
           <a:p>
-            <a:r>
-              <a:rPr lang="en-US" dirty="0"/>
-              <a:t/>
-            </a:r>
             <a:endParaRPr lang="en-US" dirty="0"/>
           </a:p>
         </p:txBody>
@@ -1222,10 +971,6 @@
           <a:bodyPr/>
           <a:lstStyle/>
           <a:p>
-            <a:r>
-              <a:rPr lang="en-US" dirty="0"/>
-              <a:t/>
-            </a:r>
             <a:endParaRPr lang="en-US" dirty="0"/>
           </a:p>
         </p:txBody>
@@ -1310,10 +1055,6 @@
           <a:bodyPr/>
           <a:lstStyle/>
           <a:p>
-            <a:r>
-              <a:rPr lang="en-US" dirty="0"/>
-              <a:t/>
-            </a:r>
             <a:endParaRPr lang="en-US" dirty="0"/>
           </a:p>
         </p:txBody>
@@ -1398,10 +1139,6 @@
           <a:bodyPr/>
           <a:lstStyle/>
           <a:p>
-            <a:r>
-              <a:rPr lang="en-US" dirty="0"/>
-              <a:t/>
-            </a:r>
             <a:endParaRPr lang="en-US" dirty="0"/>
           </a:p>
         </p:txBody>
@@ -1486,10 +1223,6 @@
           <a:bodyPr/>
           <a:lstStyle/>
           <a:p>
-            <a:r>
-              <a:rPr lang="en-US" dirty="0"/>
-              <a:t/>
-            </a:r>
             <a:endParaRPr lang="en-US" dirty="0"/>
           </a:p>
         </p:txBody>
@@ -1574,10 +1307,6 @@
           <a:bodyPr/>
           <a:lstStyle/>
           <a:p>
-            <a:r>
-              <a:rPr lang="en-US" dirty="0"/>
-              <a:t/>
-            </a:r>
             <a:endParaRPr lang="en-US" dirty="0"/>
           </a:p>
         </p:txBody>
@@ -1662,10 +1391,6 @@
           <a:bodyPr/>
           <a:lstStyle/>
           <a:p>
-            <a:r>
-              <a:rPr lang="en-US" dirty="0"/>
-              <a:t/>
-            </a:r>
             <a:endParaRPr lang="en-US" dirty="0"/>
           </a:p>
         </p:txBody>
@@ -1750,10 +1475,6 @@
           <a:bodyPr/>
           <a:lstStyle/>
           <a:p>
-            <a:r>
-              <a:rPr lang="en-US" dirty="0"/>
-              <a:t/>
-            </a:r>
             <a:endParaRPr lang="en-US" dirty="0"/>
           </a:p>
         </p:txBody>
@@ -1838,10 +1559,6 @@
           <a:bodyPr/>
           <a:lstStyle/>
           <a:p>
-            <a:r>
-              <a:rPr lang="en-US" dirty="0"/>
-              <a:t/>
-            </a:r>
             <a:endParaRPr lang="en-US" dirty="0"/>
           </a:p>
         </p:txBody>
@@ -1926,10 +1643,6 @@
           <a:bodyPr/>
           <a:lstStyle/>
           <a:p>
-            <a:r>
-              <a:rPr lang="en-US" dirty="0"/>
-              <a:t/>
-            </a:r>
             <a:endParaRPr lang="en-US" dirty="0"/>
           </a:p>
         </p:txBody>
@@ -2014,10 +1727,6 @@
           <a:bodyPr/>
           <a:lstStyle/>
           <a:p>
-            <a:r>
-              <a:rPr lang="en-US" dirty="0"/>
-              <a:t/>
-            </a:r>
             <a:endParaRPr lang="en-US" dirty="0"/>
           </a:p>
         </p:txBody>
@@ -2102,10 +1811,6 @@
           <a:bodyPr/>
           <a:lstStyle/>
           <a:p>
-            <a:r>
-              <a:rPr lang="en-US" dirty="0"/>
-              <a:t/>
-            </a:r>
             <a:endParaRPr lang="en-US" dirty="0"/>
           </a:p>
         </p:txBody>
@@ -2179,6 +1884,11 @@
 <file path=ppt/slideMasters/slideMaster1.xml><?xml version="1.0" encoding="utf-8"?>
 <p:sldMaster xmlns:a="http://schemas.openxmlformats.org/drawingml/2006/main" xmlns:r="http://schemas.openxmlformats.org/officeDocument/2006/relationships" xmlns:p="http://schemas.openxmlformats.org/presentationml/2006/main">
   <p:cSld>
+    <p:bg>
+      <p:bgRef idx="1001">
+        <a:schemeClr val="bg1"/>
+      </p:bgRef>
+    </p:bg>
     <p:spTree>
       <p:nvGrpSpPr>
         <p:cNvPr id="1" name=""/>
@@ -2461,6 +2171,7 @@
         <a:solidFill>
           <a:srgbClr val="1B1F3B"/>
         </a:solidFill>
+        <a:effectLst/>
       </p:bgPr>
     </p:bg>
     <p:spTree>
@@ -2496,6 +2207,13 @@
           </a:solidFill>
           <a:ln/>
         </p:spPr>
+        <p:txBody>
+          <a:bodyPr/>
+          <a:lstStyle/>
+          <a:p>
+            <a:endParaRPr lang="en-US"/>
+          </a:p>
+        </p:txBody>
       </p:sp>
       <p:sp>
         <p:nvSpPr>
@@ -2516,6 +2234,13 @@
           </a:solidFill>
           <a:ln/>
         </p:spPr>
+        <p:txBody>
+          <a:bodyPr/>
+          <a:lstStyle/>
+          <a:p>
+            <a:endParaRPr lang="en-US"/>
+          </a:p>
+        </p:txBody>
       </p:sp>
       <p:sp>
         <p:nvSpPr>
@@ -2538,11 +2263,11 @@
           <a:bodyPr wrap="square" rtlCol="0" anchor="ctr"/>
           <a:lstStyle/>
           <a:p>
-            <a:pPr indent="0" marL="0">
-              <a:buNone/>
-            </a:pPr>
-            <a:r>
-              <a:rPr lang="en-US" sz="1300" b="1" spc="300" kern="0" dirty="0">
+            <a:pPr marL="0" indent="0">
+              <a:buNone/>
+            </a:pPr>
+            <a:r>
+              <a:rPr lang="en-US" sz="1300" b="1" kern="0" spc="300" dirty="0">
                 <a:solidFill>
                   <a:srgbClr val="9CA3E8"/>
                 </a:solidFill>
@@ -2577,7 +2302,7 @@
           <a:bodyPr wrap="square" rtlCol="0" anchor="ctr"/>
           <a:lstStyle/>
           <a:p>
-            <a:pPr indent="0" marL="0">
+            <a:pPr marL="0" indent="0">
               <a:buNone/>
             </a:pPr>
             <a:r>
@@ -2616,7 +2341,7 @@
           <a:bodyPr wrap="square" rtlCol="0" anchor="ctr"/>
           <a:lstStyle/>
           <a:p>
-            <a:pPr indent="0" marL="0">
+            <a:pPr marL="0" indent="0">
               <a:buNone/>
             </a:pPr>
             <a:r>
@@ -2633,7 +2358,7 @@
             <a:endParaRPr lang="en-US" sz="1900" dirty="0"/>
           </a:p>
           <a:p>
-            <a:pPr indent="0" marL="0">
+            <a:pPr marL="0" indent="0">
               <a:buNone/>
             </a:pPr>
             <a:r>
@@ -2670,6 +2395,13 @@
           </a:solidFill>
           <a:ln/>
         </p:spPr>
+        <p:txBody>
+          <a:bodyPr/>
+          <a:lstStyle/>
+          <a:p>
+            <a:endParaRPr lang="en-US"/>
+          </a:p>
+        </p:txBody>
       </p:sp>
       <p:sp>
         <p:nvSpPr>
@@ -2692,7 +2424,7 @@
           <a:bodyPr wrap="square" rtlCol="0" anchor="ctr"/>
           <a:lstStyle/>
           <a:p>
-            <a:pPr indent="0" marL="0">
+            <a:pPr marL="0" indent="0">
               <a:lnSpc>
                 <a:spcPct val="135000"/>
               </a:lnSpc>
@@ -2709,12 +2441,6 @@
               </a:rPr>
               <a:t>Prepared by  </a:t>
             </a:r>
-            <a:pPr indent="0" marL="0">
-              <a:lnSpc>
-                <a:spcPct val="135000"/>
-              </a:lnSpc>
-              <a:buNone/>
-            </a:pPr>
             <a:r>
               <a:rPr lang="en-US" sz="1500" b="1" dirty="0">
                 <a:solidFill>
@@ -2727,12 +2453,6 @@
               <a:t>Adem Ouerhani
 </a:t>
             </a:r>
-            <a:pPr indent="0" marL="0">
-              <a:lnSpc>
-                <a:spcPct val="135000"/>
-              </a:lnSpc>
-              <a:buNone/>
-            </a:pPr>
             <a:r>
               <a:rPr lang="en-US" sz="1300" dirty="0">
                 <a:solidFill>
@@ -2744,12 +2464,6 @@
               </a:rPr>
               <a:t>Professional Supervisor  </a:t>
             </a:r>
-            <a:pPr indent="0" marL="0">
-              <a:lnSpc>
-                <a:spcPct val="135000"/>
-              </a:lnSpc>
-              <a:buNone/>
-            </a:pPr>
             <a:r>
               <a:rPr lang="en-US" sz="1500" b="1" dirty="0">
                 <a:solidFill>
@@ -2762,12 +2476,6 @@
               <a:t>Mr. Mkaissi Khalil — Kernel Solution &amp; Innovation
 </a:t>
             </a:r>
-            <a:pPr indent="0" marL="0">
-              <a:lnSpc>
-                <a:spcPct val="135000"/>
-              </a:lnSpc>
-              <a:buNone/>
-            </a:pPr>
             <a:r>
               <a:rPr lang="en-US" sz="1300" dirty="0">
                 <a:solidFill>
@@ -2779,12 +2487,6 @@
               </a:rPr>
               <a:t>Institution  </a:t>
             </a:r>
-            <a:pPr indent="0" marL="0">
-              <a:lnSpc>
-                <a:spcPct val="135000"/>
-              </a:lnSpc>
-              <a:buNone/>
-            </a:pPr>
             <a:r>
               <a:rPr lang="en-US" sz="1500" b="1" dirty="0">
                 <a:solidFill>
@@ -2819,6 +2521,13 @@
           </a:solidFill>
           <a:ln/>
         </p:spPr>
+        <p:txBody>
+          <a:bodyPr/>
+          <a:lstStyle/>
+          <a:p>
+            <a:endParaRPr lang="en-US"/>
+          </a:p>
+        </p:txBody>
       </p:sp>
       <p:sp>
         <p:nvSpPr>
@@ -2839,6 +2548,13 @@
           </a:solidFill>
           <a:ln/>
         </p:spPr>
+        <p:txBody>
+          <a:bodyPr/>
+          <a:lstStyle/>
+          <a:p>
+            <a:endParaRPr lang="en-US"/>
+          </a:p>
+        </p:txBody>
       </p:sp>
       <p:sp>
         <p:nvSpPr>
@@ -2861,7 +2577,7 @@
           <a:bodyPr wrap="square" rtlCol="0" anchor="ctr"/>
           <a:lstStyle/>
           <a:p>
-            <a:pPr algn="r" indent="0" marL="0">
+            <a:pPr marL="0" indent="0" algn="r">
               <a:buNone/>
             </a:pPr>
             <a:r>
@@ -2895,6 +2611,7 @@
         <a:solidFill>
           <a:srgbClr val="FFFFFF"/>
         </a:solidFill>
+        <a:effectLst/>
       </p:bgPr>
     </p:bg>
     <p:spTree>
@@ -2930,6 +2647,13 @@
           </a:solidFill>
           <a:ln/>
         </p:spPr>
+        <p:txBody>
+          <a:bodyPr/>
+          <a:lstStyle/>
+          <a:p>
+            <a:endParaRPr lang="en-US"/>
+          </a:p>
+        </p:txBody>
       </p:sp>
       <p:sp>
         <p:nvSpPr>
@@ -2950,6 +2674,13 @@
           </a:solidFill>
           <a:ln/>
         </p:spPr>
+        <p:txBody>
+          <a:bodyPr/>
+          <a:lstStyle/>
+          <a:p>
+            <a:endParaRPr lang="en-US"/>
+          </a:p>
+        </p:txBody>
       </p:sp>
       <p:sp>
         <p:nvSpPr>
@@ -2972,7 +2703,7 @@
           <a:bodyPr wrap="square" rtlCol="0" anchor="ctr"/>
           <a:lstStyle/>
           <a:p>
-            <a:pPr algn="r" indent="0" marL="0">
+            <a:pPr marL="0" indent="0" algn="r">
               <a:buNone/>
             </a:pPr>
             <a:r>
@@ -3011,11 +2742,11 @@
           <a:bodyPr wrap="square" rtlCol="0" anchor="ctr"/>
           <a:lstStyle/>
           <a:p>
-            <a:pPr indent="0" marL="0">
-              <a:buNone/>
-            </a:pPr>
-            <a:r>
-              <a:rPr lang="en-US" sz="1200" b="1" spc="200" kern="0" dirty="0">
+            <a:pPr marL="0" indent="0">
+              <a:buNone/>
+            </a:pPr>
+            <a:r>
+              <a:rPr lang="en-US" sz="1200" b="1" kern="0" spc="200" dirty="0">
                 <a:solidFill>
                   <a:srgbClr val="4F46E5"/>
                 </a:solidFill>
@@ -3050,7 +2781,7 @@
           <a:bodyPr wrap="square" rtlCol="0" anchor="ctr"/>
           <a:lstStyle/>
           <a:p>
-            <a:pPr indent="0" marL="0">
+            <a:pPr marL="0" indent="0">
               <a:buNone/>
             </a:pPr>
             <a:r>
@@ -3089,7 +2820,7 @@
           <a:bodyPr wrap="square" rtlCol="0" anchor="ctr"/>
           <a:lstStyle/>
           <a:p>
-            <a:pPr indent="0" marL="0">
+            <a:pPr marL="0" indent="0">
               <a:buNone/>
             </a:pPr>
             <a:r>
@@ -3126,6 +2857,13 @@
           </a:solidFill>
           <a:ln/>
         </p:spPr>
+        <p:txBody>
+          <a:bodyPr/>
+          <a:lstStyle/>
+          <a:p>
+            <a:endParaRPr lang="en-US"/>
+          </a:p>
+        </p:txBody>
       </p:sp>
       <p:sp>
         <p:nvSpPr>
@@ -3148,7 +2886,7 @@
           <a:bodyPr wrap="square" rtlCol="0" anchor="ctr"/>
           <a:lstStyle/>
           <a:p>
-            <a:pPr indent="0" marL="0">
+            <a:pPr marL="0" indent="0">
               <a:lnSpc>
                 <a:spcPct val="120000"/>
               </a:lnSpc>
@@ -3188,6 +2926,13 @@
           </a:solidFill>
           <a:ln/>
         </p:spPr>
+        <p:txBody>
+          <a:bodyPr/>
+          <a:lstStyle/>
+          <a:p>
+            <a:endParaRPr lang="en-US"/>
+          </a:p>
+        </p:txBody>
       </p:sp>
       <p:sp>
         <p:nvSpPr>
@@ -3210,7 +2955,7 @@
           <a:bodyPr wrap="square" rtlCol="0" anchor="ctr"/>
           <a:lstStyle/>
           <a:p>
-            <a:pPr indent="0" marL="0">
+            <a:pPr marL="0" indent="0">
               <a:lnSpc>
                 <a:spcPct val="120000"/>
               </a:lnSpc>
@@ -3250,6 +2995,13 @@
           </a:solidFill>
           <a:ln/>
         </p:spPr>
+        <p:txBody>
+          <a:bodyPr/>
+          <a:lstStyle/>
+          <a:p>
+            <a:endParaRPr lang="en-US"/>
+          </a:p>
+        </p:txBody>
       </p:sp>
       <p:sp>
         <p:nvSpPr>
@@ -3272,7 +3024,7 @@
           <a:bodyPr wrap="square" rtlCol="0" anchor="ctr"/>
           <a:lstStyle/>
           <a:p>
-            <a:pPr indent="0" marL="0">
+            <a:pPr marL="0" indent="0">
               <a:lnSpc>
                 <a:spcPct val="120000"/>
               </a:lnSpc>
@@ -3312,6 +3064,13 @@
           </a:solidFill>
           <a:ln/>
         </p:spPr>
+        <p:txBody>
+          <a:bodyPr/>
+          <a:lstStyle/>
+          <a:p>
+            <a:endParaRPr lang="en-US"/>
+          </a:p>
+        </p:txBody>
       </p:sp>
       <p:sp>
         <p:nvSpPr>
@@ -3334,7 +3093,7 @@
           <a:bodyPr wrap="square" rtlCol="0" anchor="ctr"/>
           <a:lstStyle/>
           <a:p>
-            <a:pPr indent="0" marL="0">
+            <a:pPr marL="0" indent="0">
               <a:lnSpc>
                 <a:spcPct val="120000"/>
               </a:lnSpc>
@@ -3357,14 +3116,14 @@
       </p:sp>
       <p:pic>
         <p:nvPicPr>
-          <p:cNvPr id="16" name="Image 0" descr="/home/claude/work/build/assets/screenshot_sprint1_login.png">    </p:cNvPr>
+          <p:cNvPr id="16" name="Image 0" descr="/home/claude/work/build/assets/screenshot_sprint1_login.png"/>
           <p:cNvPicPr>
             <a:picLocks noChangeAspect="1"/>
           </p:cNvPicPr>
           <p:nvPr/>
         </p:nvPicPr>
         <p:blipFill>
-          <a:blip r:embed="rId1"/>
+          <a:blip r:embed="rId3"/>
           <a:stretch>
             <a:fillRect/>
           </a:stretch>
@@ -3400,6 +3159,13 @@
             <a:prstDash val="solid"/>
           </a:ln>
         </p:spPr>
+        <p:txBody>
+          <a:bodyPr/>
+          <a:lstStyle/>
+          <a:p>
+            <a:endParaRPr lang="en-US"/>
+          </a:p>
+        </p:txBody>
       </p:sp>
     </p:spTree>
   </p:cSld>
@@ -3417,6 +3183,7 @@
         <a:solidFill>
           <a:srgbClr val="FFFFFF"/>
         </a:solidFill>
+        <a:effectLst/>
       </p:bgPr>
     </p:bg>
     <p:spTree>
@@ -3452,6 +3219,13 @@
           </a:solidFill>
           <a:ln/>
         </p:spPr>
+        <p:txBody>
+          <a:bodyPr/>
+          <a:lstStyle/>
+          <a:p>
+            <a:endParaRPr lang="en-US"/>
+          </a:p>
+        </p:txBody>
       </p:sp>
       <p:sp>
         <p:nvSpPr>
@@ -3472,6 +3246,13 @@
           </a:solidFill>
           <a:ln/>
         </p:spPr>
+        <p:txBody>
+          <a:bodyPr/>
+          <a:lstStyle/>
+          <a:p>
+            <a:endParaRPr lang="en-US"/>
+          </a:p>
+        </p:txBody>
       </p:sp>
       <p:sp>
         <p:nvSpPr>
@@ -3494,7 +3275,7 @@
           <a:bodyPr wrap="square" rtlCol="0" anchor="ctr"/>
           <a:lstStyle/>
           <a:p>
-            <a:pPr algn="r" indent="0" marL="0">
+            <a:pPr marL="0" indent="0" algn="r">
               <a:buNone/>
             </a:pPr>
             <a:r>
@@ -3533,11 +3314,11 @@
           <a:bodyPr wrap="square" rtlCol="0" anchor="ctr"/>
           <a:lstStyle/>
           <a:p>
-            <a:pPr indent="0" marL="0">
-              <a:buNone/>
-            </a:pPr>
-            <a:r>
-              <a:rPr lang="en-US" sz="1200" b="1" spc="200" kern="0" dirty="0">
+            <a:pPr marL="0" indent="0">
+              <a:buNone/>
+            </a:pPr>
+            <a:r>
+              <a:rPr lang="en-US" sz="1200" b="1" kern="0" spc="200" dirty="0">
                 <a:solidFill>
                   <a:srgbClr val="4F46E5"/>
                 </a:solidFill>
@@ -3572,7 +3353,7 @@
           <a:bodyPr wrap="square" rtlCol="0" anchor="ctr"/>
           <a:lstStyle/>
           <a:p>
-            <a:pPr indent="0" marL="0">
+            <a:pPr marL="0" indent="0">
               <a:buNone/>
             </a:pPr>
             <a:r>
@@ -3611,7 +3392,7 @@
           <a:bodyPr wrap="square" rtlCol="0" anchor="ctr"/>
           <a:lstStyle/>
           <a:p>
-            <a:pPr indent="0" marL="0">
+            <a:pPr marL="0" indent="0">
               <a:buNone/>
             </a:pPr>
             <a:r>
@@ -3648,6 +3429,13 @@
           </a:solidFill>
           <a:ln/>
         </p:spPr>
+        <p:txBody>
+          <a:bodyPr/>
+          <a:lstStyle/>
+          <a:p>
+            <a:endParaRPr lang="en-US"/>
+          </a:p>
+        </p:txBody>
       </p:sp>
       <p:sp>
         <p:nvSpPr>
@@ -3670,7 +3458,7 @@
           <a:bodyPr wrap="square" rtlCol="0" anchor="ctr"/>
           <a:lstStyle/>
           <a:p>
-            <a:pPr indent="0" marL="0">
+            <a:pPr marL="0" indent="0">
               <a:lnSpc>
                 <a:spcPct val="120000"/>
               </a:lnSpc>
@@ -3710,6 +3498,13 @@
           </a:solidFill>
           <a:ln/>
         </p:spPr>
+        <p:txBody>
+          <a:bodyPr/>
+          <a:lstStyle/>
+          <a:p>
+            <a:endParaRPr lang="en-US"/>
+          </a:p>
+        </p:txBody>
       </p:sp>
       <p:sp>
         <p:nvSpPr>
@@ -3732,7 +3527,7 @@
           <a:bodyPr wrap="square" rtlCol="0" anchor="ctr"/>
           <a:lstStyle/>
           <a:p>
-            <a:pPr indent="0" marL="0">
+            <a:pPr marL="0" indent="0">
               <a:lnSpc>
                 <a:spcPct val="120000"/>
               </a:lnSpc>
@@ -3772,6 +3567,13 @@
           </a:solidFill>
           <a:ln/>
         </p:spPr>
+        <p:txBody>
+          <a:bodyPr/>
+          <a:lstStyle/>
+          <a:p>
+            <a:endParaRPr lang="en-US"/>
+          </a:p>
+        </p:txBody>
       </p:sp>
       <p:sp>
         <p:nvSpPr>
@@ -3794,7 +3596,7 @@
           <a:bodyPr wrap="square" rtlCol="0" anchor="ctr"/>
           <a:lstStyle/>
           <a:p>
-            <a:pPr indent="0" marL="0">
+            <a:pPr marL="0" indent="0">
               <a:lnSpc>
                 <a:spcPct val="120000"/>
               </a:lnSpc>
@@ -3834,6 +3636,13 @@
           </a:solidFill>
           <a:ln/>
         </p:spPr>
+        <p:txBody>
+          <a:bodyPr/>
+          <a:lstStyle/>
+          <a:p>
+            <a:endParaRPr lang="en-US"/>
+          </a:p>
+        </p:txBody>
       </p:sp>
       <p:sp>
         <p:nvSpPr>
@@ -3856,7 +3665,7 @@
           <a:bodyPr wrap="square" rtlCol="0" anchor="ctr"/>
           <a:lstStyle/>
           <a:p>
-            <a:pPr indent="0" marL="0">
+            <a:pPr marL="0" indent="0">
               <a:lnSpc>
                 <a:spcPct val="120000"/>
               </a:lnSpc>
@@ -3879,14 +3688,14 @@
       </p:sp>
       <p:pic>
         <p:nvPicPr>
-          <p:cNvPr id="16" name="Image 0" descr="/home/claude/work/build/assets/screenshot_sprint2_board.png">    </p:cNvPr>
+          <p:cNvPr id="16" name="Image 0" descr="/home/claude/work/build/assets/screenshot_sprint2_board.png"/>
           <p:cNvPicPr>
             <a:picLocks noChangeAspect="1"/>
           </p:cNvPicPr>
           <p:nvPr/>
         </p:nvPicPr>
         <p:blipFill>
-          <a:blip r:embed="rId1"/>
+          <a:blip r:embed="rId3"/>
           <a:stretch>
             <a:fillRect/>
           </a:stretch>
@@ -3922,6 +3731,13 @@
             <a:prstDash val="solid"/>
           </a:ln>
         </p:spPr>
+        <p:txBody>
+          <a:bodyPr/>
+          <a:lstStyle/>
+          <a:p>
+            <a:endParaRPr lang="en-US"/>
+          </a:p>
+        </p:txBody>
       </p:sp>
     </p:spTree>
   </p:cSld>
@@ -3939,6 +3755,7 @@
         <a:solidFill>
           <a:srgbClr val="FFFFFF"/>
         </a:solidFill>
+        <a:effectLst/>
       </p:bgPr>
     </p:bg>
     <p:spTree>
@@ -3974,6 +3791,13 @@
           </a:solidFill>
           <a:ln/>
         </p:spPr>
+        <p:txBody>
+          <a:bodyPr/>
+          <a:lstStyle/>
+          <a:p>
+            <a:endParaRPr lang="en-US"/>
+          </a:p>
+        </p:txBody>
       </p:sp>
       <p:sp>
         <p:nvSpPr>
@@ -3994,6 +3818,13 @@
           </a:solidFill>
           <a:ln/>
         </p:spPr>
+        <p:txBody>
+          <a:bodyPr/>
+          <a:lstStyle/>
+          <a:p>
+            <a:endParaRPr lang="en-US"/>
+          </a:p>
+        </p:txBody>
       </p:sp>
       <p:sp>
         <p:nvSpPr>
@@ -4016,7 +3847,7 @@
           <a:bodyPr wrap="square" rtlCol="0" anchor="ctr"/>
           <a:lstStyle/>
           <a:p>
-            <a:pPr algn="r" indent="0" marL="0">
+            <a:pPr marL="0" indent="0" algn="r">
               <a:buNone/>
             </a:pPr>
             <a:r>
@@ -4055,11 +3886,11 @@
           <a:bodyPr wrap="square" rtlCol="0" anchor="ctr"/>
           <a:lstStyle/>
           <a:p>
-            <a:pPr indent="0" marL="0">
-              <a:buNone/>
-            </a:pPr>
-            <a:r>
-              <a:rPr lang="en-US" sz="1200" b="1" spc="200" kern="0" dirty="0">
+            <a:pPr marL="0" indent="0">
+              <a:buNone/>
+            </a:pPr>
+            <a:r>
+              <a:rPr lang="en-US" sz="1200" b="1" kern="0" spc="200" dirty="0">
                 <a:solidFill>
                   <a:srgbClr val="4F46E5"/>
                 </a:solidFill>
@@ -4094,7 +3925,7 @@
           <a:bodyPr wrap="square" rtlCol="0" anchor="ctr"/>
           <a:lstStyle/>
           <a:p>
-            <a:pPr indent="0" marL="0">
+            <a:pPr marL="0" indent="0">
               <a:buNone/>
             </a:pPr>
             <a:r>
@@ -4133,7 +3964,7 @@
           <a:bodyPr wrap="square" rtlCol="0" anchor="ctr"/>
           <a:lstStyle/>
           <a:p>
-            <a:pPr indent="0" marL="0">
+            <a:pPr marL="0" indent="0">
               <a:buNone/>
             </a:pPr>
             <a:r>
@@ -4170,6 +4001,13 @@
           </a:solidFill>
           <a:ln/>
         </p:spPr>
+        <p:txBody>
+          <a:bodyPr/>
+          <a:lstStyle/>
+          <a:p>
+            <a:endParaRPr lang="en-US"/>
+          </a:p>
+        </p:txBody>
       </p:sp>
       <p:sp>
         <p:nvSpPr>
@@ -4192,7 +4030,7 @@
           <a:bodyPr wrap="square" rtlCol="0" anchor="ctr"/>
           <a:lstStyle/>
           <a:p>
-            <a:pPr indent="0" marL="0">
+            <a:pPr marL="0" indent="0">
               <a:lnSpc>
                 <a:spcPct val="120000"/>
               </a:lnSpc>
@@ -4232,6 +4070,13 @@
           </a:solidFill>
           <a:ln/>
         </p:spPr>
+        <p:txBody>
+          <a:bodyPr/>
+          <a:lstStyle/>
+          <a:p>
+            <a:endParaRPr lang="en-US"/>
+          </a:p>
+        </p:txBody>
       </p:sp>
       <p:sp>
         <p:nvSpPr>
@@ -4254,7 +4099,7 @@
           <a:bodyPr wrap="square" rtlCol="0" anchor="ctr"/>
           <a:lstStyle/>
           <a:p>
-            <a:pPr indent="0" marL="0">
+            <a:pPr marL="0" indent="0">
               <a:lnSpc>
                 <a:spcPct val="120000"/>
               </a:lnSpc>
@@ -4294,6 +4139,13 @@
           </a:solidFill>
           <a:ln/>
         </p:spPr>
+        <p:txBody>
+          <a:bodyPr/>
+          <a:lstStyle/>
+          <a:p>
+            <a:endParaRPr lang="en-US"/>
+          </a:p>
+        </p:txBody>
       </p:sp>
       <p:sp>
         <p:nvSpPr>
@@ -4316,7 +4168,7 @@
           <a:bodyPr wrap="square" rtlCol="0" anchor="ctr"/>
           <a:lstStyle/>
           <a:p>
-            <a:pPr indent="0" marL="0">
+            <a:pPr marL="0" indent="0">
               <a:lnSpc>
                 <a:spcPct val="120000"/>
               </a:lnSpc>
@@ -4356,6 +4208,13 @@
           </a:solidFill>
           <a:ln/>
         </p:spPr>
+        <p:txBody>
+          <a:bodyPr/>
+          <a:lstStyle/>
+          <a:p>
+            <a:endParaRPr lang="en-US"/>
+          </a:p>
+        </p:txBody>
       </p:sp>
       <p:sp>
         <p:nvSpPr>
@@ -4378,7 +4237,7 @@
           <a:bodyPr wrap="square" rtlCol="0" anchor="ctr"/>
           <a:lstStyle/>
           <a:p>
-            <a:pPr indent="0" marL="0">
+            <a:pPr marL="0" indent="0">
               <a:lnSpc>
                 <a:spcPct val="120000"/>
               </a:lnSpc>
@@ -4401,14 +4260,14 @@
       </p:sp>
       <p:pic>
         <p:nvPicPr>
-          <p:cNvPr id="16" name="Image 0" descr="/home/claude/work/build/assets/screenshot_sprint3_notifications.png">    </p:cNvPr>
+          <p:cNvPr id="16" name="Image 0" descr="/home/claude/work/build/assets/screenshot_sprint3_notifications.png"/>
           <p:cNvPicPr>
             <a:picLocks noChangeAspect="1"/>
           </p:cNvPicPr>
           <p:nvPr/>
         </p:nvPicPr>
         <p:blipFill>
-          <a:blip r:embed="rId1"/>
+          <a:blip r:embed="rId3"/>
           <a:stretch>
             <a:fillRect/>
           </a:stretch>
@@ -4444,6 +4303,13 @@
             <a:prstDash val="solid"/>
           </a:ln>
         </p:spPr>
+        <p:txBody>
+          <a:bodyPr/>
+          <a:lstStyle/>
+          <a:p>
+            <a:endParaRPr lang="en-US"/>
+          </a:p>
+        </p:txBody>
       </p:sp>
     </p:spTree>
   </p:cSld>
@@ -4461,6 +4327,7 @@
         <a:solidFill>
           <a:srgbClr val="FFFFFF"/>
         </a:solidFill>
+        <a:effectLst/>
       </p:bgPr>
     </p:bg>
     <p:spTree>
@@ -4496,6 +4363,13 @@
           </a:solidFill>
           <a:ln/>
         </p:spPr>
+        <p:txBody>
+          <a:bodyPr/>
+          <a:lstStyle/>
+          <a:p>
+            <a:endParaRPr lang="en-US"/>
+          </a:p>
+        </p:txBody>
       </p:sp>
       <p:sp>
         <p:nvSpPr>
@@ -4516,6 +4390,13 @@
           </a:solidFill>
           <a:ln/>
         </p:spPr>
+        <p:txBody>
+          <a:bodyPr/>
+          <a:lstStyle/>
+          <a:p>
+            <a:endParaRPr lang="en-US"/>
+          </a:p>
+        </p:txBody>
       </p:sp>
       <p:sp>
         <p:nvSpPr>
@@ -4538,7 +4419,7 @@
           <a:bodyPr wrap="square" rtlCol="0" anchor="ctr"/>
           <a:lstStyle/>
           <a:p>
-            <a:pPr algn="r" indent="0" marL="0">
+            <a:pPr marL="0" indent="0" algn="r">
               <a:buNone/>
             </a:pPr>
             <a:r>
@@ -4577,11 +4458,11 @@
           <a:bodyPr wrap="square" rtlCol="0" anchor="ctr"/>
           <a:lstStyle/>
           <a:p>
-            <a:pPr indent="0" marL="0">
-              <a:buNone/>
-            </a:pPr>
-            <a:r>
-              <a:rPr lang="en-US" sz="1200" b="1" spc="200" kern="0" dirty="0">
+            <a:pPr marL="0" indent="0">
+              <a:buNone/>
+            </a:pPr>
+            <a:r>
+              <a:rPr lang="en-US" sz="1200" b="1" kern="0" spc="200" dirty="0">
                 <a:solidFill>
                   <a:srgbClr val="4F46E5"/>
                 </a:solidFill>
@@ -4616,7 +4497,7 @@
           <a:bodyPr wrap="square" rtlCol="0" anchor="ctr"/>
           <a:lstStyle/>
           <a:p>
-            <a:pPr indent="0" marL="0">
+            <a:pPr marL="0" indent="0">
               <a:buNone/>
             </a:pPr>
             <a:r>
@@ -4655,7 +4536,7 @@
           <a:bodyPr wrap="square" rtlCol="0" anchor="ctr"/>
           <a:lstStyle/>
           <a:p>
-            <a:pPr indent="0" marL="0">
+            <a:pPr marL="0" indent="0">
               <a:buNone/>
             </a:pPr>
             <a:r>
@@ -4692,6 +4573,13 @@
           </a:solidFill>
           <a:ln/>
         </p:spPr>
+        <p:txBody>
+          <a:bodyPr/>
+          <a:lstStyle/>
+          <a:p>
+            <a:endParaRPr lang="en-US"/>
+          </a:p>
+        </p:txBody>
       </p:sp>
       <p:sp>
         <p:nvSpPr>
@@ -4714,7 +4602,7 @@
           <a:bodyPr wrap="square" rtlCol="0" anchor="ctr"/>
           <a:lstStyle/>
           <a:p>
-            <a:pPr indent="0" marL="0">
+            <a:pPr marL="0" indent="0">
               <a:lnSpc>
                 <a:spcPct val="120000"/>
               </a:lnSpc>
@@ -4754,6 +4642,13 @@
           </a:solidFill>
           <a:ln/>
         </p:spPr>
+        <p:txBody>
+          <a:bodyPr/>
+          <a:lstStyle/>
+          <a:p>
+            <a:endParaRPr lang="en-US"/>
+          </a:p>
+        </p:txBody>
       </p:sp>
       <p:sp>
         <p:nvSpPr>
@@ -4776,7 +4671,7 @@
           <a:bodyPr wrap="square" rtlCol="0" anchor="ctr"/>
           <a:lstStyle/>
           <a:p>
-            <a:pPr indent="0" marL="0">
+            <a:pPr marL="0" indent="0">
               <a:lnSpc>
                 <a:spcPct val="120000"/>
               </a:lnSpc>
@@ -4816,6 +4711,13 @@
           </a:solidFill>
           <a:ln/>
         </p:spPr>
+        <p:txBody>
+          <a:bodyPr/>
+          <a:lstStyle/>
+          <a:p>
+            <a:endParaRPr lang="en-US"/>
+          </a:p>
+        </p:txBody>
       </p:sp>
       <p:sp>
         <p:nvSpPr>
@@ -4838,7 +4740,7 @@
           <a:bodyPr wrap="square" rtlCol="0" anchor="ctr"/>
           <a:lstStyle/>
           <a:p>
-            <a:pPr indent="0" marL="0">
+            <a:pPr marL="0" indent="0">
               <a:lnSpc>
                 <a:spcPct val="120000"/>
               </a:lnSpc>
@@ -4878,6 +4780,13 @@
           </a:solidFill>
           <a:ln/>
         </p:spPr>
+        <p:txBody>
+          <a:bodyPr/>
+          <a:lstStyle/>
+          <a:p>
+            <a:endParaRPr lang="en-US"/>
+          </a:p>
+        </p:txBody>
       </p:sp>
       <p:sp>
         <p:nvSpPr>
@@ -4900,7 +4809,7 @@
           <a:bodyPr wrap="square" rtlCol="0" anchor="ctr"/>
           <a:lstStyle/>
           <a:p>
-            <a:pPr indent="0" marL="0">
+            <a:pPr marL="0" indent="0">
               <a:lnSpc>
                 <a:spcPct val="120000"/>
               </a:lnSpc>
@@ -4923,14 +4832,14 @@
       </p:sp>
       <p:pic>
         <p:nvPicPr>
-          <p:cNvPr id="16" name="Image 0" descr="/home/claude/work/build/assets/screenshot_sprint4_dashboard.png">    </p:cNvPr>
+          <p:cNvPr id="16" name="Image 0" descr="/home/claude/work/build/assets/screenshot_sprint4_dashboard.png"/>
           <p:cNvPicPr>
             <a:picLocks noChangeAspect="1"/>
           </p:cNvPicPr>
           <p:nvPr/>
         </p:nvPicPr>
         <p:blipFill>
-          <a:blip r:embed="rId1"/>
+          <a:blip r:embed="rId3"/>
           <a:stretch>
             <a:fillRect/>
           </a:stretch>
@@ -4966,6 +4875,13 @@
             <a:prstDash val="solid"/>
           </a:ln>
         </p:spPr>
+        <p:txBody>
+          <a:bodyPr/>
+          <a:lstStyle/>
+          <a:p>
+            <a:endParaRPr lang="en-US"/>
+          </a:p>
+        </p:txBody>
       </p:sp>
     </p:spTree>
   </p:cSld>
@@ -4983,6 +4899,7 @@
         <a:solidFill>
           <a:srgbClr val="FFFFFF"/>
         </a:solidFill>
+        <a:effectLst/>
       </p:bgPr>
     </p:bg>
     <p:spTree>
@@ -5018,6 +4935,13 @@
           </a:solidFill>
           <a:ln/>
         </p:spPr>
+        <p:txBody>
+          <a:bodyPr/>
+          <a:lstStyle/>
+          <a:p>
+            <a:endParaRPr lang="en-US"/>
+          </a:p>
+        </p:txBody>
       </p:sp>
       <p:sp>
         <p:nvSpPr>
@@ -5038,6 +4962,13 @@
           </a:solidFill>
           <a:ln/>
         </p:spPr>
+        <p:txBody>
+          <a:bodyPr/>
+          <a:lstStyle/>
+          <a:p>
+            <a:endParaRPr lang="en-US"/>
+          </a:p>
+        </p:txBody>
       </p:sp>
       <p:sp>
         <p:nvSpPr>
@@ -5060,7 +4991,7 @@
           <a:bodyPr wrap="square" rtlCol="0" anchor="ctr"/>
           <a:lstStyle/>
           <a:p>
-            <a:pPr algn="r" indent="0" marL="0">
+            <a:pPr marL="0" indent="0" algn="r">
               <a:buNone/>
             </a:pPr>
             <a:r>
@@ -5099,11 +5030,11 @@
           <a:bodyPr wrap="square" rtlCol="0" anchor="ctr"/>
           <a:lstStyle/>
           <a:p>
-            <a:pPr indent="0" marL="0">
-              <a:buNone/>
-            </a:pPr>
-            <a:r>
-              <a:rPr lang="en-US" sz="1200" b="1" spc="200" kern="0" dirty="0">
+            <a:pPr marL="0" indent="0">
+              <a:buNone/>
+            </a:pPr>
+            <a:r>
+              <a:rPr lang="en-US" sz="1200" b="1" kern="0" spc="200" dirty="0">
                 <a:solidFill>
                   <a:srgbClr val="4F46E5"/>
                 </a:solidFill>
@@ -5138,7 +5069,7 @@
           <a:bodyPr wrap="square" rtlCol="0" anchor="ctr"/>
           <a:lstStyle/>
           <a:p>
-            <a:pPr indent="0" marL="0">
+            <a:pPr marL="0" indent="0">
               <a:buNone/>
             </a:pPr>
             <a:r>
@@ -5158,22 +5089,23 @@
       </p:sp>
       <p:pic>
         <p:nvPicPr>
-          <p:cNvPr id="7" name="Image 0" descr="/home/claude/work/build/assets/fig_architecture.png">    </p:cNvPr>
+          <p:cNvPr id="7" name="Image 0" descr="/home/claude/work/build/assets/fig_architecture.png"/>
           <p:cNvPicPr>
             <a:picLocks noChangeAspect="1"/>
           </p:cNvPicPr>
           <p:nvPr/>
         </p:nvPicPr>
         <p:blipFill>
-          <a:blip r:embed="rId1"/>
+          <a:blip r:embed="rId3"/>
+          <a:srcRect b="18755"/>
           <a:stretch>
             <a:fillRect/>
           </a:stretch>
         </p:blipFill>
         <p:spPr>
           <a:xfrm>
-            <a:off x="1249528" y="1691640"/>
-            <a:ext cx="9692640" cy="5962908"/>
+            <a:off x="1249527" y="1425391"/>
+            <a:ext cx="9692640" cy="4665586"/>
           </a:xfrm>
           <a:prstGeom prst="rect">
             <a:avLst/>
@@ -5196,6 +5128,7 @@
         <a:solidFill>
           <a:srgbClr val="1B1F3B"/>
         </a:solidFill>
+        <a:effectLst/>
       </p:bgPr>
     </p:bg>
     <p:spTree>
@@ -5231,6 +5164,13 @@
           </a:solidFill>
           <a:ln/>
         </p:spPr>
+        <p:txBody>
+          <a:bodyPr/>
+          <a:lstStyle/>
+          <a:p>
+            <a:endParaRPr lang="en-US"/>
+          </a:p>
+        </p:txBody>
       </p:sp>
       <p:sp>
         <p:nvSpPr>
@@ -5251,6 +5191,13 @@
           </a:solidFill>
           <a:ln/>
         </p:spPr>
+        <p:txBody>
+          <a:bodyPr/>
+          <a:lstStyle/>
+          <a:p>
+            <a:endParaRPr lang="en-US"/>
+          </a:p>
+        </p:txBody>
       </p:sp>
       <p:sp>
         <p:nvSpPr>
@@ -5273,7 +5220,7 @@
           <a:bodyPr wrap="square" rtlCol="0" anchor="ctr"/>
           <a:lstStyle/>
           <a:p>
-            <a:pPr algn="r" indent="0" marL="0">
+            <a:pPr marL="0" indent="0" algn="r">
               <a:buNone/>
             </a:pPr>
             <a:r>
@@ -5312,11 +5259,11 @@
           <a:bodyPr wrap="square" rtlCol="0" anchor="ctr"/>
           <a:lstStyle/>
           <a:p>
-            <a:pPr indent="0" marL="0">
-              <a:buNone/>
-            </a:pPr>
-            <a:r>
-              <a:rPr lang="en-US" sz="1200" b="1" spc="200" kern="0" dirty="0">
+            <a:pPr marL="0" indent="0">
+              <a:buNone/>
+            </a:pPr>
+            <a:r>
+              <a:rPr lang="en-US" sz="1200" b="1" kern="0" spc="200" dirty="0">
                 <a:solidFill>
                   <a:srgbClr val="4F46E5"/>
                 </a:solidFill>
@@ -5351,7 +5298,7 @@
           <a:bodyPr wrap="square" rtlCol="0" anchor="ctr"/>
           <a:lstStyle/>
           <a:p>
-            <a:pPr indent="0" marL="0">
+            <a:pPr marL="0" indent="0">
               <a:buNone/>
             </a:pPr>
             <a:r>
@@ -5390,6 +5337,13 @@
           </a:solidFill>
           <a:ln/>
         </p:spPr>
+        <p:txBody>
+          <a:bodyPr/>
+          <a:lstStyle/>
+          <a:p>
+            <a:endParaRPr lang="en-US"/>
+          </a:p>
+        </p:txBody>
       </p:sp>
       <p:sp>
         <p:nvSpPr>
@@ -5412,7 +5366,7 @@
           <a:bodyPr wrap="square" rtlCol="0" anchor="ctr"/>
           <a:lstStyle/>
           <a:p>
-            <a:pPr algn="ctr" indent="0" marL="0">
+            <a:pPr marL="0" indent="0" algn="ctr">
               <a:buNone/>
             </a:pPr>
             <a:r>
@@ -5451,7 +5405,7 @@
           <a:bodyPr wrap="square" rtlCol="0" anchor="ctr"/>
           <a:lstStyle/>
           <a:p>
-            <a:pPr algn="ctr" indent="0" marL="0">
+            <a:pPr marL="0" indent="0" algn="ctr">
               <a:buNone/>
             </a:pPr>
             <a:r>
@@ -5490,6 +5444,13 @@
           </a:solidFill>
           <a:ln/>
         </p:spPr>
+        <p:txBody>
+          <a:bodyPr/>
+          <a:lstStyle/>
+          <a:p>
+            <a:endParaRPr lang="en-US"/>
+          </a:p>
+        </p:txBody>
       </p:sp>
       <p:sp>
         <p:nvSpPr>
@@ -5512,7 +5473,7 @@
           <a:bodyPr wrap="square" rtlCol="0" anchor="ctr"/>
           <a:lstStyle/>
           <a:p>
-            <a:pPr algn="ctr" indent="0" marL="0">
+            <a:pPr marL="0" indent="0" algn="ctr">
               <a:buNone/>
             </a:pPr>
             <a:r>
@@ -5551,7 +5512,7 @@
           <a:bodyPr wrap="square" rtlCol="0" anchor="ctr"/>
           <a:lstStyle/>
           <a:p>
-            <a:pPr algn="ctr" indent="0" marL="0">
+            <a:pPr marL="0" indent="0" algn="ctr">
               <a:buNone/>
             </a:pPr>
             <a:r>
@@ -5590,6 +5551,13 @@
           </a:solidFill>
           <a:ln/>
         </p:spPr>
+        <p:txBody>
+          <a:bodyPr/>
+          <a:lstStyle/>
+          <a:p>
+            <a:endParaRPr lang="en-US"/>
+          </a:p>
+        </p:txBody>
       </p:sp>
       <p:sp>
         <p:nvSpPr>
@@ -5612,7 +5580,7 @@
           <a:bodyPr wrap="square" rtlCol="0" anchor="ctr"/>
           <a:lstStyle/>
           <a:p>
-            <a:pPr algn="ctr" indent="0" marL="0">
+            <a:pPr marL="0" indent="0" algn="ctr">
               <a:buNone/>
             </a:pPr>
             <a:r>
@@ -5651,7 +5619,7 @@
           <a:bodyPr wrap="square" rtlCol="0" anchor="ctr"/>
           <a:lstStyle/>
           <a:p>
-            <a:pPr algn="ctr" indent="0" marL="0">
+            <a:pPr marL="0" indent="0" algn="ctr">
               <a:buNone/>
             </a:pPr>
             <a:r>
@@ -5690,6 +5658,13 @@
           </a:solidFill>
           <a:ln/>
         </p:spPr>
+        <p:txBody>
+          <a:bodyPr/>
+          <a:lstStyle/>
+          <a:p>
+            <a:endParaRPr lang="en-US"/>
+          </a:p>
+        </p:txBody>
       </p:sp>
       <p:sp>
         <p:nvSpPr>
@@ -5712,7 +5687,7 @@
           <a:bodyPr wrap="square" rtlCol="0" anchor="ctr"/>
           <a:lstStyle/>
           <a:p>
-            <a:pPr algn="ctr" indent="0" marL="0">
+            <a:pPr marL="0" indent="0" algn="ctr">
               <a:buNone/>
             </a:pPr>
             <a:r>
@@ -5751,7 +5726,7 @@
           <a:bodyPr wrap="square" rtlCol="0" anchor="ctr"/>
           <a:lstStyle/>
           <a:p>
-            <a:pPr algn="ctr" indent="0" marL="0">
+            <a:pPr marL="0" indent="0" algn="ctr">
               <a:buNone/>
             </a:pPr>
             <a:r>
@@ -5790,7 +5765,7 @@
           <a:bodyPr wrap="square" rtlCol="0" anchor="ctr"/>
           <a:lstStyle/>
           <a:p>
-            <a:pPr algn="ctr" indent="0" marL="0">
+            <a:pPr marL="0" indent="0" algn="ctr">
               <a:buNone/>
             </a:pPr>
             <a:r>
@@ -5824,6 +5799,7 @@
         <a:solidFill>
           <a:srgbClr val="FFFFFF"/>
         </a:solidFill>
+        <a:effectLst/>
       </p:bgPr>
     </p:bg>
     <p:spTree>
@@ -5859,6 +5835,13 @@
           </a:solidFill>
           <a:ln/>
         </p:spPr>
+        <p:txBody>
+          <a:bodyPr/>
+          <a:lstStyle/>
+          <a:p>
+            <a:endParaRPr lang="en-US"/>
+          </a:p>
+        </p:txBody>
       </p:sp>
       <p:sp>
         <p:nvSpPr>
@@ -5879,6 +5862,13 @@
           </a:solidFill>
           <a:ln/>
         </p:spPr>
+        <p:txBody>
+          <a:bodyPr/>
+          <a:lstStyle/>
+          <a:p>
+            <a:endParaRPr lang="en-US"/>
+          </a:p>
+        </p:txBody>
       </p:sp>
       <p:sp>
         <p:nvSpPr>
@@ -5901,7 +5891,7 @@
           <a:bodyPr wrap="square" rtlCol="0" anchor="ctr"/>
           <a:lstStyle/>
           <a:p>
-            <a:pPr algn="r" indent="0" marL="0">
+            <a:pPr marL="0" indent="0" algn="r">
               <a:buNone/>
             </a:pPr>
             <a:r>
@@ -5940,11 +5930,11 @@
           <a:bodyPr wrap="square" rtlCol="0" anchor="ctr"/>
           <a:lstStyle/>
           <a:p>
-            <a:pPr indent="0" marL="0">
-              <a:buNone/>
-            </a:pPr>
-            <a:r>
-              <a:rPr lang="en-US" sz="1200" b="1" spc="200" kern="0" dirty="0">
+            <a:pPr marL="0" indent="0">
+              <a:buNone/>
+            </a:pPr>
+            <a:r>
+              <a:rPr lang="en-US" sz="1200" b="1" kern="0" spc="200" dirty="0">
                 <a:solidFill>
                   <a:srgbClr val="4F46E5"/>
                 </a:solidFill>
@@ -5979,7 +5969,7 @@
           <a:bodyPr wrap="square" rtlCol="0" anchor="ctr"/>
           <a:lstStyle/>
           <a:p>
-            <a:pPr indent="0" marL="0">
+            <a:pPr marL="0" indent="0">
               <a:buNone/>
             </a:pPr>
             <a:r>
@@ -6018,6 +6008,13 @@
           </a:solidFill>
           <a:ln/>
         </p:spPr>
+        <p:txBody>
+          <a:bodyPr/>
+          <a:lstStyle/>
+          <a:p>
+            <a:endParaRPr lang="en-US"/>
+          </a:p>
+        </p:txBody>
       </p:sp>
       <p:sp>
         <p:nvSpPr>
@@ -6040,7 +6037,7 @@
           <a:bodyPr wrap="square" rtlCol="0" anchor="ctr"/>
           <a:lstStyle/>
           <a:p>
-            <a:pPr indent="0" marL="0">
+            <a:pPr marL="0" indent="0">
               <a:buNone/>
             </a:pPr>
             <a:r>
@@ -6079,7 +6076,7 @@
           <a:bodyPr wrap="square" rtlCol="0" anchor="ctr"/>
           <a:lstStyle/>
           <a:p>
-            <a:pPr indent="0" marL="0">
+            <a:pPr marL="0" indent="0">
               <a:buNone/>
             </a:pPr>
             <a:r>
@@ -6118,7 +6115,7 @@
           <a:bodyPr wrap="square" rtlCol="0" anchor="ctr"/>
           <a:lstStyle/>
           <a:p>
-            <a:pPr indent="0" marL="0">
+            <a:pPr marL="0" indent="0">
               <a:buNone/>
             </a:pPr>
             <a:r>
@@ -6157,7 +6154,7 @@
           <a:bodyPr wrap="square" rtlCol="0" anchor="ctr"/>
           <a:lstStyle/>
           <a:p>
-            <a:pPr indent="0" marL="0">
+            <a:pPr marL="0" indent="0">
               <a:buNone/>
             </a:pPr>
             <a:r>
@@ -6196,7 +6193,7 @@
           <a:bodyPr wrap="square" rtlCol="0" anchor="ctr"/>
           <a:lstStyle/>
           <a:p>
-            <a:pPr indent="0" marL="0">
+            <a:pPr marL="0" indent="0">
               <a:buNone/>
             </a:pPr>
             <a:r>
@@ -6235,7 +6232,7 @@
           <a:bodyPr wrap="square" rtlCol="0" anchor="ctr"/>
           <a:lstStyle/>
           <a:p>
-            <a:pPr indent="0" marL="0">
+            <a:pPr marL="0" indent="0">
               <a:buNone/>
             </a:pPr>
             <a:r>
@@ -6274,6 +6271,13 @@
           </a:solidFill>
           <a:ln/>
         </p:spPr>
+        <p:txBody>
+          <a:bodyPr/>
+          <a:lstStyle/>
+          <a:p>
+            <a:endParaRPr lang="en-US"/>
+          </a:p>
+        </p:txBody>
       </p:sp>
       <p:sp>
         <p:nvSpPr>
@@ -6296,7 +6300,7 @@
           <a:bodyPr wrap="square" rtlCol="0" anchor="ctr"/>
           <a:lstStyle/>
           <a:p>
-            <a:pPr indent="0" marL="0">
+            <a:pPr marL="0" indent="0">
               <a:buNone/>
             </a:pPr>
             <a:r>
@@ -6335,7 +6339,7 @@
           <a:bodyPr wrap="square" rtlCol="0" anchor="ctr"/>
           <a:lstStyle/>
           <a:p>
-            <a:pPr indent="0" marL="0">
+            <a:pPr marL="0" indent="0">
               <a:buNone/>
             </a:pPr>
             <a:r>
@@ -6374,7 +6378,7 @@
           <a:bodyPr wrap="square" rtlCol="0" anchor="ctr"/>
           <a:lstStyle/>
           <a:p>
-            <a:pPr indent="0" marL="0">
+            <a:pPr marL="0" indent="0">
               <a:buNone/>
             </a:pPr>
             <a:r>
@@ -6413,7 +6417,7 @@
           <a:bodyPr wrap="square" rtlCol="0" anchor="ctr"/>
           <a:lstStyle/>
           <a:p>
-            <a:pPr indent="0" marL="0">
+            <a:pPr marL="0" indent="0">
               <a:buNone/>
             </a:pPr>
             <a:r>
@@ -6447,6 +6451,7 @@
         <a:solidFill>
           <a:srgbClr val="FFFFFF"/>
         </a:solidFill>
+        <a:effectLst/>
       </p:bgPr>
     </p:bg>
     <p:spTree>
@@ -6482,6 +6487,13 @@
           </a:solidFill>
           <a:ln/>
         </p:spPr>
+        <p:txBody>
+          <a:bodyPr/>
+          <a:lstStyle/>
+          <a:p>
+            <a:endParaRPr lang="en-US"/>
+          </a:p>
+        </p:txBody>
       </p:sp>
       <p:sp>
         <p:nvSpPr>
@@ -6502,6 +6514,13 @@
           </a:solidFill>
           <a:ln/>
         </p:spPr>
+        <p:txBody>
+          <a:bodyPr/>
+          <a:lstStyle/>
+          <a:p>
+            <a:endParaRPr lang="en-US"/>
+          </a:p>
+        </p:txBody>
       </p:sp>
       <p:sp>
         <p:nvSpPr>
@@ -6524,7 +6543,7 @@
           <a:bodyPr wrap="square" rtlCol="0" anchor="ctr"/>
           <a:lstStyle/>
           <a:p>
-            <a:pPr algn="r" indent="0" marL="0">
+            <a:pPr marL="0" indent="0" algn="r">
               <a:buNone/>
             </a:pPr>
             <a:r>
@@ -6563,11 +6582,11 @@
           <a:bodyPr wrap="square" rtlCol="0" anchor="ctr"/>
           <a:lstStyle/>
           <a:p>
-            <a:pPr indent="0" marL="0">
-              <a:buNone/>
-            </a:pPr>
-            <a:r>
-              <a:rPr lang="en-US" sz="1200" b="1" spc="200" kern="0" dirty="0">
+            <a:pPr marL="0" indent="0">
+              <a:buNone/>
+            </a:pPr>
+            <a:r>
+              <a:rPr lang="en-US" sz="1200" b="1" kern="0" spc="200" dirty="0">
                 <a:solidFill>
                   <a:srgbClr val="4F46E5"/>
                 </a:solidFill>
@@ -6602,7 +6621,7 @@
           <a:bodyPr wrap="square" rtlCol="0" anchor="ctr"/>
           <a:lstStyle/>
           <a:p>
-            <a:pPr indent="0" marL="0">
+            <a:pPr marL="0" indent="0">
               <a:buNone/>
             </a:pPr>
             <a:r>
@@ -6641,6 +6660,13 @@
           </a:solidFill>
           <a:ln/>
         </p:spPr>
+        <p:txBody>
+          <a:bodyPr/>
+          <a:lstStyle/>
+          <a:p>
+            <a:endParaRPr lang="en-US"/>
+          </a:p>
+        </p:txBody>
       </p:sp>
       <p:sp>
         <p:nvSpPr>
@@ -6661,6 +6687,13 @@
           </a:solidFill>
           <a:ln/>
         </p:spPr>
+        <p:txBody>
+          <a:bodyPr/>
+          <a:lstStyle/>
+          <a:p>
+            <a:endParaRPr lang="en-US"/>
+          </a:p>
+        </p:txBody>
       </p:sp>
       <p:sp>
         <p:nvSpPr>
@@ -6683,7 +6716,7 @@
           <a:bodyPr wrap="square" rtlCol="0" anchor="ctr"/>
           <a:lstStyle/>
           <a:p>
-            <a:pPr algn="ctr" indent="0" marL="0">
+            <a:pPr marL="0" indent="0" algn="ctr">
               <a:buNone/>
             </a:pPr>
             <a:r>
@@ -6722,7 +6755,7 @@
           <a:bodyPr wrap="square" rtlCol="0" anchor="ctr"/>
           <a:lstStyle/>
           <a:p>
-            <a:pPr indent="0" marL="0">
+            <a:pPr marL="0" indent="0">
               <a:buNone/>
             </a:pPr>
             <a:r>
@@ -6761,6 +6794,13 @@
           </a:solidFill>
           <a:ln/>
         </p:spPr>
+        <p:txBody>
+          <a:bodyPr/>
+          <a:lstStyle/>
+          <a:p>
+            <a:endParaRPr lang="en-US"/>
+          </a:p>
+        </p:txBody>
       </p:sp>
       <p:sp>
         <p:nvSpPr>
@@ -6781,6 +6821,13 @@
           </a:solidFill>
           <a:ln/>
         </p:spPr>
+        <p:txBody>
+          <a:bodyPr/>
+          <a:lstStyle/>
+          <a:p>
+            <a:endParaRPr lang="en-US"/>
+          </a:p>
+        </p:txBody>
       </p:sp>
       <p:sp>
         <p:nvSpPr>
@@ -6803,7 +6850,7 @@
           <a:bodyPr wrap="square" rtlCol="0" anchor="ctr"/>
           <a:lstStyle/>
           <a:p>
-            <a:pPr algn="ctr" indent="0" marL="0">
+            <a:pPr marL="0" indent="0" algn="ctr">
               <a:buNone/>
             </a:pPr>
             <a:r>
@@ -6842,7 +6889,7 @@
           <a:bodyPr wrap="square" rtlCol="0" anchor="ctr"/>
           <a:lstStyle/>
           <a:p>
-            <a:pPr indent="0" marL="0">
+            <a:pPr marL="0" indent="0">
               <a:buNone/>
             </a:pPr>
             <a:r>
@@ -6881,6 +6928,13 @@
           </a:solidFill>
           <a:ln/>
         </p:spPr>
+        <p:txBody>
+          <a:bodyPr/>
+          <a:lstStyle/>
+          <a:p>
+            <a:endParaRPr lang="en-US"/>
+          </a:p>
+        </p:txBody>
       </p:sp>
       <p:sp>
         <p:nvSpPr>
@@ -6901,6 +6955,13 @@
           </a:solidFill>
           <a:ln/>
         </p:spPr>
+        <p:txBody>
+          <a:bodyPr/>
+          <a:lstStyle/>
+          <a:p>
+            <a:endParaRPr lang="en-US"/>
+          </a:p>
+        </p:txBody>
       </p:sp>
       <p:sp>
         <p:nvSpPr>
@@ -6923,7 +6984,7 @@
           <a:bodyPr wrap="square" rtlCol="0" anchor="ctr"/>
           <a:lstStyle/>
           <a:p>
-            <a:pPr algn="ctr" indent="0" marL="0">
+            <a:pPr marL="0" indent="0" algn="ctr">
               <a:buNone/>
             </a:pPr>
             <a:r>
@@ -6962,7 +7023,7 @@
           <a:bodyPr wrap="square" rtlCol="0" anchor="ctr"/>
           <a:lstStyle/>
           <a:p>
-            <a:pPr indent="0" marL="0">
+            <a:pPr marL="0" indent="0">
               <a:buNone/>
             </a:pPr>
             <a:r>
@@ -7001,6 +7062,13 @@
           </a:solidFill>
           <a:ln/>
         </p:spPr>
+        <p:txBody>
+          <a:bodyPr/>
+          <a:lstStyle/>
+          <a:p>
+            <a:endParaRPr lang="en-US"/>
+          </a:p>
+        </p:txBody>
       </p:sp>
       <p:sp>
         <p:nvSpPr>
@@ -7021,6 +7089,13 @@
           </a:solidFill>
           <a:ln/>
         </p:spPr>
+        <p:txBody>
+          <a:bodyPr/>
+          <a:lstStyle/>
+          <a:p>
+            <a:endParaRPr lang="en-US"/>
+          </a:p>
+        </p:txBody>
       </p:sp>
       <p:sp>
         <p:nvSpPr>
@@ -7043,7 +7118,7 @@
           <a:bodyPr wrap="square" rtlCol="0" anchor="ctr"/>
           <a:lstStyle/>
           <a:p>
-            <a:pPr algn="ctr" indent="0" marL="0">
+            <a:pPr marL="0" indent="0" algn="ctr">
               <a:buNone/>
             </a:pPr>
             <a:r>
@@ -7082,7 +7157,7 @@
           <a:bodyPr wrap="square" rtlCol="0" anchor="ctr"/>
           <a:lstStyle/>
           <a:p>
-            <a:pPr indent="0" marL="0">
+            <a:pPr marL="0" indent="0">
               <a:buNone/>
             </a:pPr>
             <a:r>
@@ -7121,6 +7196,13 @@
           </a:solidFill>
           <a:ln/>
         </p:spPr>
+        <p:txBody>
+          <a:bodyPr/>
+          <a:lstStyle/>
+          <a:p>
+            <a:endParaRPr lang="en-US"/>
+          </a:p>
+        </p:txBody>
       </p:sp>
       <p:sp>
         <p:nvSpPr>
@@ -7141,6 +7223,13 @@
           </a:solidFill>
           <a:ln/>
         </p:spPr>
+        <p:txBody>
+          <a:bodyPr/>
+          <a:lstStyle/>
+          <a:p>
+            <a:endParaRPr lang="en-US"/>
+          </a:p>
+        </p:txBody>
       </p:sp>
       <p:sp>
         <p:nvSpPr>
@@ -7163,7 +7252,7 @@
           <a:bodyPr wrap="square" rtlCol="0" anchor="ctr"/>
           <a:lstStyle/>
           <a:p>
-            <a:pPr algn="ctr" indent="0" marL="0">
+            <a:pPr marL="0" indent="0" algn="ctr">
               <a:buNone/>
             </a:pPr>
             <a:r>
@@ -7202,7 +7291,7 @@
           <a:bodyPr wrap="square" rtlCol="0" anchor="ctr"/>
           <a:lstStyle/>
           <a:p>
-            <a:pPr indent="0" marL="0">
+            <a:pPr marL="0" indent="0">
               <a:buNone/>
             </a:pPr>
             <a:r>
@@ -7241,6 +7330,13 @@
           </a:solidFill>
           <a:ln/>
         </p:spPr>
+        <p:txBody>
+          <a:bodyPr/>
+          <a:lstStyle/>
+          <a:p>
+            <a:endParaRPr lang="en-US"/>
+          </a:p>
+        </p:txBody>
       </p:sp>
       <p:sp>
         <p:nvSpPr>
@@ -7261,6 +7357,13 @@
           </a:solidFill>
           <a:ln/>
         </p:spPr>
+        <p:txBody>
+          <a:bodyPr/>
+          <a:lstStyle/>
+          <a:p>
+            <a:endParaRPr lang="en-US"/>
+          </a:p>
+        </p:txBody>
       </p:sp>
       <p:sp>
         <p:nvSpPr>
@@ -7283,7 +7386,7 @@
           <a:bodyPr wrap="square" rtlCol="0" anchor="ctr"/>
           <a:lstStyle/>
           <a:p>
-            <a:pPr algn="ctr" indent="0" marL="0">
+            <a:pPr marL="0" indent="0" algn="ctr">
               <a:buNone/>
             </a:pPr>
             <a:r>
@@ -7322,7 +7425,7 @@
           <a:bodyPr wrap="square" rtlCol="0" anchor="ctr"/>
           <a:lstStyle/>
           <a:p>
-            <a:pPr indent="0" marL="0">
+            <a:pPr marL="0" indent="0">
               <a:buNone/>
             </a:pPr>
             <a:r>
@@ -7356,6 +7459,7 @@
         <a:solidFill>
           <a:srgbClr val="1B1F3B"/>
         </a:solidFill>
+        <a:effectLst/>
       </p:bgPr>
     </p:bg>
     <p:spTree>
@@ -7391,6 +7495,13 @@
           </a:solidFill>
           <a:ln/>
         </p:spPr>
+        <p:txBody>
+          <a:bodyPr/>
+          <a:lstStyle/>
+          <a:p>
+            <a:endParaRPr lang="en-US"/>
+          </a:p>
+        </p:txBody>
       </p:sp>
       <p:sp>
         <p:nvSpPr>
@@ -7411,6 +7522,13 @@
           </a:solidFill>
           <a:ln/>
         </p:spPr>
+        <p:txBody>
+          <a:bodyPr/>
+          <a:lstStyle/>
+          <a:p>
+            <a:endParaRPr lang="en-US"/>
+          </a:p>
+        </p:txBody>
       </p:sp>
       <p:sp>
         <p:nvSpPr>
@@ -7433,7 +7551,7 @@
           <a:bodyPr wrap="square" rtlCol="0" anchor="ctr"/>
           <a:lstStyle/>
           <a:p>
-            <a:pPr algn="r" indent="0" marL="0">
+            <a:pPr marL="0" indent="0" algn="r">
               <a:buNone/>
             </a:pPr>
             <a:r>
@@ -7470,6 +7588,13 @@
           </a:solidFill>
           <a:ln/>
         </p:spPr>
+        <p:txBody>
+          <a:bodyPr/>
+          <a:lstStyle/>
+          <a:p>
+            <a:endParaRPr lang="en-US"/>
+          </a:p>
+        </p:txBody>
       </p:sp>
       <p:sp>
         <p:nvSpPr>
@@ -7492,11 +7617,11 @@
           <a:bodyPr wrap="square" rtlCol="0" anchor="ctr"/>
           <a:lstStyle/>
           <a:p>
-            <a:pPr indent="0" marL="0">
-              <a:buNone/>
-            </a:pPr>
-            <a:r>
-              <a:rPr lang="en-US" sz="1200" b="1" spc="200" kern="0" dirty="0">
+            <a:pPr marL="0" indent="0">
+              <a:buNone/>
+            </a:pPr>
+            <a:r>
+              <a:rPr lang="en-US" sz="1200" b="1" kern="0" spc="200" dirty="0">
                 <a:solidFill>
                   <a:srgbClr val="4F46E5"/>
                 </a:solidFill>
@@ -7531,7 +7656,7 @@
           <a:bodyPr wrap="square" rtlCol="0" anchor="ctr"/>
           <a:lstStyle/>
           <a:p>
-            <a:pPr indent="0" marL="0">
+            <a:pPr marL="0" indent="0">
               <a:buNone/>
             </a:pPr>
             <a:r>
@@ -7570,7 +7695,7 @@
           <a:bodyPr wrap="square" rtlCol="0" anchor="ctr"/>
           <a:lstStyle/>
           <a:p>
-            <a:pPr indent="0" marL="0">
+            <a:pPr marL="0" indent="0">
               <a:lnSpc>
                 <a:spcPct val="135000"/>
               </a:lnSpc>
@@ -7612,7 +7737,7 @@
           <a:bodyPr wrap="square" rtlCol="0" anchor="ctr"/>
           <a:lstStyle/>
           <a:p>
-            <a:pPr indent="0" marL="0">
+            <a:pPr marL="0" indent="0">
               <a:lnSpc>
                 <a:spcPct val="135000"/>
               </a:lnSpc>
@@ -7649,6 +7774,7 @@
         <a:solidFill>
           <a:srgbClr val="1B1F3B"/>
         </a:solidFill>
+        <a:effectLst/>
       </p:bgPr>
     </p:bg>
     <p:spTree>
@@ -7684,6 +7810,13 @@
           </a:solidFill>
           <a:ln/>
         </p:spPr>
+        <p:txBody>
+          <a:bodyPr/>
+          <a:lstStyle/>
+          <a:p>
+            <a:endParaRPr lang="en-US"/>
+          </a:p>
+        </p:txBody>
       </p:sp>
       <p:sp>
         <p:nvSpPr>
@@ -7706,7 +7839,7 @@
           <a:bodyPr wrap="square" rtlCol="0" anchor="ctr"/>
           <a:lstStyle/>
           <a:p>
-            <a:pPr indent="0" marL="0">
+            <a:pPr marL="0" indent="0">
               <a:buNone/>
             </a:pPr>
             <a:r>
@@ -7745,7 +7878,7 @@
           <a:bodyPr wrap="square" rtlCol="0" anchor="ctr"/>
           <a:lstStyle/>
           <a:p>
-            <a:pPr indent="0" marL="0">
+            <a:pPr marL="0" indent="0">
               <a:buNone/>
             </a:pPr>
             <a:r>
@@ -7782,6 +7915,13 @@
           </a:solidFill>
           <a:ln/>
         </p:spPr>
+        <p:txBody>
+          <a:bodyPr/>
+          <a:lstStyle/>
+          <a:p>
+            <a:endParaRPr lang="en-US"/>
+          </a:p>
+        </p:txBody>
       </p:sp>
       <p:sp>
         <p:nvSpPr>
@@ -7804,7 +7944,7 @@
           <a:bodyPr wrap="square" rtlCol="0" anchor="ctr"/>
           <a:lstStyle/>
           <a:p>
-            <a:pPr indent="0" marL="0">
+            <a:pPr marL="0" indent="0">
               <a:buNone/>
             </a:pPr>
             <a:r>
@@ -7841,6 +7981,13 @@
           </a:solidFill>
           <a:ln/>
         </p:spPr>
+        <p:txBody>
+          <a:bodyPr/>
+          <a:lstStyle/>
+          <a:p>
+            <a:endParaRPr lang="en-US"/>
+          </a:p>
+        </p:txBody>
       </p:sp>
       <p:sp>
         <p:nvSpPr>
@@ -7861,6 +8008,13 @@
           </a:solidFill>
           <a:ln/>
         </p:spPr>
+        <p:txBody>
+          <a:bodyPr/>
+          <a:lstStyle/>
+          <a:p>
+            <a:endParaRPr lang="en-US"/>
+          </a:p>
+        </p:txBody>
       </p:sp>
       <p:sp>
         <p:nvSpPr>
@@ -7883,7 +8037,7 @@
           <a:bodyPr wrap="square" rtlCol="0" anchor="ctr"/>
           <a:lstStyle/>
           <a:p>
-            <a:pPr algn="r" indent="0" marL="0">
+            <a:pPr marL="0" indent="0" algn="r">
               <a:buNone/>
             </a:pPr>
             <a:r>
@@ -7917,6 +8071,7 @@
         <a:solidFill>
           <a:srgbClr val="FFFFFF"/>
         </a:solidFill>
+        <a:effectLst/>
       </p:bgPr>
     </p:bg>
     <p:spTree>
@@ -7952,6 +8107,13 @@
           </a:solidFill>
           <a:ln/>
         </p:spPr>
+        <p:txBody>
+          <a:bodyPr/>
+          <a:lstStyle/>
+          <a:p>
+            <a:endParaRPr lang="en-US"/>
+          </a:p>
+        </p:txBody>
       </p:sp>
       <p:sp>
         <p:nvSpPr>
@@ -7972,6 +8134,13 @@
           </a:solidFill>
           <a:ln/>
         </p:spPr>
+        <p:txBody>
+          <a:bodyPr/>
+          <a:lstStyle/>
+          <a:p>
+            <a:endParaRPr lang="en-US"/>
+          </a:p>
+        </p:txBody>
       </p:sp>
       <p:sp>
         <p:nvSpPr>
@@ -7994,7 +8163,7 @@
           <a:bodyPr wrap="square" rtlCol="0" anchor="ctr"/>
           <a:lstStyle/>
           <a:p>
-            <a:pPr algn="r" indent="0" marL="0">
+            <a:pPr marL="0" indent="0" algn="r">
               <a:buNone/>
             </a:pPr>
             <a:r>
@@ -8033,11 +8202,11 @@
           <a:bodyPr wrap="square" rtlCol="0" anchor="ctr"/>
           <a:lstStyle/>
           <a:p>
-            <a:pPr indent="0" marL="0">
-              <a:buNone/>
-            </a:pPr>
-            <a:r>
-              <a:rPr lang="en-US" sz="1200" b="1" spc="200" kern="0" dirty="0">
+            <a:pPr marL="0" indent="0">
+              <a:buNone/>
+            </a:pPr>
+            <a:r>
+              <a:rPr lang="en-US" sz="1200" b="1" kern="0" spc="200" dirty="0">
                 <a:solidFill>
                   <a:srgbClr val="4F46E5"/>
                 </a:solidFill>
@@ -8072,7 +8241,7 @@
           <a:bodyPr wrap="square" rtlCol="0" anchor="ctr"/>
           <a:lstStyle/>
           <a:p>
-            <a:pPr indent="0" marL="0">
+            <a:pPr marL="0" indent="0">
               <a:buNone/>
             </a:pPr>
             <a:r>
@@ -8111,6 +8280,13 @@
           </a:solidFill>
           <a:ln/>
         </p:spPr>
+        <p:txBody>
+          <a:bodyPr/>
+          <a:lstStyle/>
+          <a:p>
+            <a:endParaRPr lang="en-US"/>
+          </a:p>
+        </p:txBody>
       </p:sp>
       <p:sp>
         <p:nvSpPr>
@@ -8133,7 +8309,7 @@
           <a:bodyPr wrap="square" rtlCol="0" anchor="ctr"/>
           <a:lstStyle/>
           <a:p>
-            <a:pPr algn="l" indent="0" marL="0">
+            <a:pPr marL="0" indent="0" algn="l">
               <a:buNone/>
             </a:pPr>
             <a:r>
@@ -8172,7 +8348,7 @@
           <a:bodyPr wrap="square" rtlCol="0" anchor="ctr"/>
           <a:lstStyle/>
           <a:p>
-            <a:pPr indent="0" marL="0">
+            <a:pPr marL="0" indent="0">
               <a:buNone/>
             </a:pPr>
             <a:r>
@@ -8211,7 +8387,7 @@
           <a:bodyPr wrap="square" rtlCol="0" anchor="ctr"/>
           <a:lstStyle/>
           <a:p>
-            <a:pPr indent="0" marL="0">
+            <a:pPr marL="0" indent="0">
               <a:buNone/>
             </a:pPr>
             <a:r>
@@ -8250,6 +8426,13 @@
           </a:solidFill>
           <a:ln/>
         </p:spPr>
+        <p:txBody>
+          <a:bodyPr/>
+          <a:lstStyle/>
+          <a:p>
+            <a:endParaRPr lang="en-US"/>
+          </a:p>
+        </p:txBody>
       </p:sp>
       <p:sp>
         <p:nvSpPr>
@@ -8272,7 +8455,7 @@
           <a:bodyPr wrap="square" rtlCol="0" anchor="ctr"/>
           <a:lstStyle/>
           <a:p>
-            <a:pPr algn="l" indent="0" marL="0">
+            <a:pPr marL="0" indent="0" algn="l">
               <a:buNone/>
             </a:pPr>
             <a:r>
@@ -8311,7 +8494,7 @@
           <a:bodyPr wrap="square" rtlCol="0" anchor="ctr"/>
           <a:lstStyle/>
           <a:p>
-            <a:pPr indent="0" marL="0">
+            <a:pPr marL="0" indent="0">
               <a:buNone/>
             </a:pPr>
             <a:r>
@@ -8350,7 +8533,7 @@
           <a:bodyPr wrap="square" rtlCol="0" anchor="ctr"/>
           <a:lstStyle/>
           <a:p>
-            <a:pPr indent="0" marL="0">
+            <a:pPr marL="0" indent="0">
               <a:buNone/>
             </a:pPr>
             <a:r>
@@ -8389,6 +8572,13 @@
           </a:solidFill>
           <a:ln/>
         </p:spPr>
+        <p:txBody>
+          <a:bodyPr/>
+          <a:lstStyle/>
+          <a:p>
+            <a:endParaRPr lang="en-US"/>
+          </a:p>
+        </p:txBody>
       </p:sp>
       <p:sp>
         <p:nvSpPr>
@@ -8411,7 +8601,7 @@
           <a:bodyPr wrap="square" rtlCol="0" anchor="ctr"/>
           <a:lstStyle/>
           <a:p>
-            <a:pPr algn="l" indent="0" marL="0">
+            <a:pPr marL="0" indent="0" algn="l">
               <a:buNone/>
             </a:pPr>
             <a:r>
@@ -8450,7 +8640,7 @@
           <a:bodyPr wrap="square" rtlCol="0" anchor="ctr"/>
           <a:lstStyle/>
           <a:p>
-            <a:pPr indent="0" marL="0">
+            <a:pPr marL="0" indent="0">
               <a:buNone/>
             </a:pPr>
             <a:r>
@@ -8489,7 +8679,7 @@
           <a:bodyPr wrap="square" rtlCol="0" anchor="ctr"/>
           <a:lstStyle/>
           <a:p>
-            <a:pPr indent="0" marL="0">
+            <a:pPr marL="0" indent="0">
               <a:buNone/>
             </a:pPr>
             <a:r>
@@ -8528,6 +8718,13 @@
           </a:solidFill>
           <a:ln/>
         </p:spPr>
+        <p:txBody>
+          <a:bodyPr/>
+          <a:lstStyle/>
+          <a:p>
+            <a:endParaRPr lang="en-US"/>
+          </a:p>
+        </p:txBody>
       </p:sp>
       <p:sp>
         <p:nvSpPr>
@@ -8550,7 +8747,7 @@
           <a:bodyPr wrap="square" rtlCol="0" anchor="ctr"/>
           <a:lstStyle/>
           <a:p>
-            <a:pPr algn="l" indent="0" marL="0">
+            <a:pPr marL="0" indent="0" algn="l">
               <a:buNone/>
             </a:pPr>
             <a:r>
@@ -8589,7 +8786,7 @@
           <a:bodyPr wrap="square" rtlCol="0" anchor="ctr"/>
           <a:lstStyle/>
           <a:p>
-            <a:pPr indent="0" marL="0">
+            <a:pPr marL="0" indent="0">
               <a:buNone/>
             </a:pPr>
             <a:r>
@@ -8628,7 +8825,7 @@
           <a:bodyPr wrap="square" rtlCol="0" anchor="ctr"/>
           <a:lstStyle/>
           <a:p>
-            <a:pPr indent="0" marL="0">
+            <a:pPr marL="0" indent="0">
               <a:buNone/>
             </a:pPr>
             <a:r>
@@ -8667,6 +8864,13 @@
           </a:solidFill>
           <a:ln/>
         </p:spPr>
+        <p:txBody>
+          <a:bodyPr/>
+          <a:lstStyle/>
+          <a:p>
+            <a:endParaRPr lang="en-US"/>
+          </a:p>
+        </p:txBody>
       </p:sp>
       <p:sp>
         <p:nvSpPr>
@@ -8689,7 +8893,7 @@
           <a:bodyPr wrap="square" rtlCol="0" anchor="ctr"/>
           <a:lstStyle/>
           <a:p>
-            <a:pPr algn="l" indent="0" marL="0">
+            <a:pPr marL="0" indent="0" algn="l">
               <a:buNone/>
             </a:pPr>
             <a:r>
@@ -8728,7 +8932,7 @@
           <a:bodyPr wrap="square" rtlCol="0" anchor="ctr"/>
           <a:lstStyle/>
           <a:p>
-            <a:pPr indent="0" marL="0">
+            <a:pPr marL="0" indent="0">
               <a:buNone/>
             </a:pPr>
             <a:r>
@@ -8767,7 +8971,7 @@
           <a:bodyPr wrap="square" rtlCol="0" anchor="ctr"/>
           <a:lstStyle/>
           <a:p>
-            <a:pPr indent="0" marL="0">
+            <a:pPr marL="0" indent="0">
               <a:buNone/>
             </a:pPr>
             <a:r>
@@ -8801,6 +9005,7 @@
         <a:solidFill>
           <a:srgbClr val="FFFFFF"/>
         </a:solidFill>
+        <a:effectLst/>
       </p:bgPr>
     </p:bg>
     <p:spTree>
@@ -8836,6 +9041,13 @@
           </a:solidFill>
           <a:ln/>
         </p:spPr>
+        <p:txBody>
+          <a:bodyPr/>
+          <a:lstStyle/>
+          <a:p>
+            <a:endParaRPr lang="en-US"/>
+          </a:p>
+        </p:txBody>
       </p:sp>
       <p:sp>
         <p:nvSpPr>
@@ -8856,6 +9068,13 @@
           </a:solidFill>
           <a:ln/>
         </p:spPr>
+        <p:txBody>
+          <a:bodyPr/>
+          <a:lstStyle/>
+          <a:p>
+            <a:endParaRPr lang="en-US"/>
+          </a:p>
+        </p:txBody>
       </p:sp>
       <p:sp>
         <p:nvSpPr>
@@ -8878,7 +9097,7 @@
           <a:bodyPr wrap="square" rtlCol="0" anchor="ctr"/>
           <a:lstStyle/>
           <a:p>
-            <a:pPr algn="r" indent="0" marL="0">
+            <a:pPr marL="0" indent="0" algn="r">
               <a:buNone/>
             </a:pPr>
             <a:r>
@@ -8917,11 +9136,11 @@
           <a:bodyPr wrap="square" rtlCol="0" anchor="ctr"/>
           <a:lstStyle/>
           <a:p>
-            <a:pPr indent="0" marL="0">
-              <a:buNone/>
-            </a:pPr>
-            <a:r>
-              <a:rPr lang="en-US" sz="1200" b="1" spc="200" kern="0" dirty="0">
+            <a:pPr marL="0" indent="0">
+              <a:buNone/>
+            </a:pPr>
+            <a:r>
+              <a:rPr lang="en-US" sz="1200" b="1" kern="0" spc="200" dirty="0">
                 <a:solidFill>
                   <a:srgbClr val="4F46E5"/>
                 </a:solidFill>
@@ -8956,7 +9175,7 @@
           <a:bodyPr wrap="square" rtlCol="0" anchor="ctr"/>
           <a:lstStyle/>
           <a:p>
-            <a:pPr indent="0" marL="0">
+            <a:pPr marL="0" indent="0">
               <a:buNone/>
             </a:pPr>
             <a:r>
@@ -8995,7 +9214,7 @@
           <a:bodyPr wrap="square" rtlCol="0" anchor="ctr"/>
           <a:lstStyle/>
           <a:p>
-            <a:pPr indent="0" marL="0">
+            <a:pPr marL="0" indent="0">
               <a:lnSpc>
                 <a:spcPct val="130000"/>
               </a:lnSpc>
@@ -9037,7 +9256,7 @@
           <a:bodyPr wrap="square" rtlCol="0" anchor="ctr"/>
           <a:lstStyle/>
           <a:p>
-            <a:pPr indent="0" marL="0">
+            <a:pPr marL="0" indent="0">
               <a:lnSpc>
                 <a:spcPct val="130000"/>
               </a:lnSpc>
@@ -9054,12 +9273,6 @@
               </a:rPr>
               <a:t>This internship (PFA) was self-directed: </a:t>
             </a:r>
-            <a:pPr indent="0" marL="0">
-              <a:lnSpc>
-                <a:spcPct val="130000"/>
-              </a:lnSpc>
-              <a:buNone/>
-            </a:pPr>
             <a:r>
               <a:rPr lang="en-US" sz="1400" dirty="0">
                 <a:solidFill>
@@ -9094,6 +9307,13 @@
           </a:solidFill>
           <a:ln/>
         </p:spPr>
+        <p:txBody>
+          <a:bodyPr/>
+          <a:lstStyle/>
+          <a:p>
+            <a:endParaRPr lang="en-US"/>
+          </a:p>
+        </p:txBody>
       </p:sp>
       <p:sp>
         <p:nvSpPr>
@@ -9116,7 +9336,7 @@
           <a:bodyPr wrap="square" rtlCol="0" anchor="ctr"/>
           <a:lstStyle/>
           <a:p>
-            <a:pPr algn="ctr" indent="0" marL="0">
+            <a:pPr marL="0" indent="0" algn="ctr">
               <a:buNone/>
             </a:pPr>
             <a:r>
@@ -9155,7 +9375,7 @@
           <a:bodyPr wrap="square" rtlCol="0" anchor="ctr"/>
           <a:lstStyle/>
           <a:p>
-            <a:pPr indent="0" marL="0">
+            <a:pPr marL="0" indent="0">
               <a:buNone/>
             </a:pPr>
             <a:r>
@@ -9194,7 +9414,7 @@
           <a:bodyPr wrap="square" rtlCol="0" anchor="ctr"/>
           <a:lstStyle/>
           <a:p>
-            <a:pPr indent="0" marL="0">
+            <a:pPr marL="0" indent="0">
               <a:buNone/>
             </a:pPr>
             <a:r>
@@ -9234,6 +9454,13 @@
             <a:prstDash val="solid"/>
           </a:ln>
         </p:spPr>
+        <p:txBody>
+          <a:bodyPr/>
+          <a:lstStyle/>
+          <a:p>
+            <a:endParaRPr lang="en-US"/>
+          </a:p>
+        </p:txBody>
       </p:sp>
       <p:sp>
         <p:nvSpPr>
@@ -9254,6 +9481,13 @@
           </a:solidFill>
           <a:ln/>
         </p:spPr>
+        <p:txBody>
+          <a:bodyPr/>
+          <a:lstStyle/>
+          <a:p>
+            <a:endParaRPr lang="en-US"/>
+          </a:p>
+        </p:txBody>
       </p:sp>
       <p:sp>
         <p:nvSpPr>
@@ -9276,7 +9510,7 @@
           <a:bodyPr wrap="square" rtlCol="0" anchor="ctr"/>
           <a:lstStyle/>
           <a:p>
-            <a:pPr algn="ctr" indent="0" marL="0">
+            <a:pPr marL="0" indent="0" algn="ctr">
               <a:buNone/>
             </a:pPr>
             <a:r>
@@ -9315,7 +9549,7 @@
           <a:bodyPr wrap="square" rtlCol="0" anchor="ctr"/>
           <a:lstStyle/>
           <a:p>
-            <a:pPr indent="0" marL="0">
+            <a:pPr marL="0" indent="0">
               <a:buNone/>
             </a:pPr>
             <a:r>
@@ -9354,7 +9588,7 @@
           <a:bodyPr wrap="square" rtlCol="0" anchor="ctr"/>
           <a:lstStyle/>
           <a:p>
-            <a:pPr indent="0" marL="0">
+            <a:pPr marL="0" indent="0">
               <a:buNone/>
             </a:pPr>
             <a:r>
@@ -9394,6 +9628,13 @@
             <a:prstDash val="solid"/>
           </a:ln>
         </p:spPr>
+        <p:txBody>
+          <a:bodyPr/>
+          <a:lstStyle/>
+          <a:p>
+            <a:endParaRPr lang="en-US"/>
+          </a:p>
+        </p:txBody>
       </p:sp>
       <p:sp>
         <p:nvSpPr>
@@ -9414,6 +9655,13 @@
           </a:solidFill>
           <a:ln/>
         </p:spPr>
+        <p:txBody>
+          <a:bodyPr/>
+          <a:lstStyle/>
+          <a:p>
+            <a:endParaRPr lang="en-US"/>
+          </a:p>
+        </p:txBody>
       </p:sp>
       <p:sp>
         <p:nvSpPr>
@@ -9436,7 +9684,7 @@
           <a:bodyPr wrap="square" rtlCol="0" anchor="ctr"/>
           <a:lstStyle/>
           <a:p>
-            <a:pPr algn="ctr" indent="0" marL="0">
+            <a:pPr marL="0" indent="0" algn="ctr">
               <a:buNone/>
             </a:pPr>
             <a:r>
@@ -9475,7 +9723,7 @@
           <a:bodyPr wrap="square" rtlCol="0" anchor="ctr"/>
           <a:lstStyle/>
           <a:p>
-            <a:pPr indent="0" marL="0">
+            <a:pPr marL="0" indent="0">
               <a:buNone/>
             </a:pPr>
             <a:r>
@@ -9514,7 +9762,7 @@
           <a:bodyPr wrap="square" rtlCol="0" anchor="ctr"/>
           <a:lstStyle/>
           <a:p>
-            <a:pPr indent="0" marL="0">
+            <a:pPr marL="0" indent="0">
               <a:buNone/>
             </a:pPr>
             <a:r>
@@ -9554,6 +9802,13 @@
             <a:prstDash val="solid"/>
           </a:ln>
         </p:spPr>
+        <p:txBody>
+          <a:bodyPr/>
+          <a:lstStyle/>
+          <a:p>
+            <a:endParaRPr lang="en-US"/>
+          </a:p>
+        </p:txBody>
       </p:sp>
       <p:sp>
         <p:nvSpPr>
@@ -9574,6 +9829,13 @@
           </a:solidFill>
           <a:ln/>
         </p:spPr>
+        <p:txBody>
+          <a:bodyPr/>
+          <a:lstStyle/>
+          <a:p>
+            <a:endParaRPr lang="en-US"/>
+          </a:p>
+        </p:txBody>
       </p:sp>
       <p:sp>
         <p:nvSpPr>
@@ -9596,7 +9858,7 @@
           <a:bodyPr wrap="square" rtlCol="0" anchor="ctr"/>
           <a:lstStyle/>
           <a:p>
-            <a:pPr algn="ctr" indent="0" marL="0">
+            <a:pPr marL="0" indent="0" algn="ctr">
               <a:buNone/>
             </a:pPr>
             <a:r>
@@ -9635,7 +9897,7 @@
           <a:bodyPr wrap="square" rtlCol="0" anchor="ctr"/>
           <a:lstStyle/>
           <a:p>
-            <a:pPr indent="0" marL="0">
+            <a:pPr marL="0" indent="0">
               <a:buNone/>
             </a:pPr>
             <a:r>
@@ -9674,7 +9936,7 @@
           <a:bodyPr wrap="square" rtlCol="0" anchor="ctr"/>
           <a:lstStyle/>
           <a:p>
-            <a:pPr indent="0" marL="0">
+            <a:pPr marL="0" indent="0">
               <a:buNone/>
             </a:pPr>
             <a:r>
@@ -9708,6 +9970,7 @@
         <a:solidFill>
           <a:srgbClr val="FFFFFF"/>
         </a:solidFill>
+        <a:effectLst/>
       </p:bgPr>
     </p:bg>
     <p:spTree>
@@ -9743,6 +10006,13 @@
           </a:solidFill>
           <a:ln/>
         </p:spPr>
+        <p:txBody>
+          <a:bodyPr/>
+          <a:lstStyle/>
+          <a:p>
+            <a:endParaRPr lang="en-US"/>
+          </a:p>
+        </p:txBody>
       </p:sp>
       <p:sp>
         <p:nvSpPr>
@@ -9763,6 +10033,13 @@
           </a:solidFill>
           <a:ln/>
         </p:spPr>
+        <p:txBody>
+          <a:bodyPr/>
+          <a:lstStyle/>
+          <a:p>
+            <a:endParaRPr lang="en-US"/>
+          </a:p>
+        </p:txBody>
       </p:sp>
       <p:sp>
         <p:nvSpPr>
@@ -9785,7 +10062,7 @@
           <a:bodyPr wrap="square" rtlCol="0" anchor="ctr"/>
           <a:lstStyle/>
           <a:p>
-            <a:pPr algn="r" indent="0" marL="0">
+            <a:pPr marL="0" indent="0" algn="r">
               <a:buNone/>
             </a:pPr>
             <a:r>
@@ -9824,11 +10101,11 @@
           <a:bodyPr wrap="square" rtlCol="0" anchor="ctr"/>
           <a:lstStyle/>
           <a:p>
-            <a:pPr indent="0" marL="0">
-              <a:buNone/>
-            </a:pPr>
-            <a:r>
-              <a:rPr lang="en-US" sz="1200" b="1" spc="200" kern="0" dirty="0">
+            <a:pPr marL="0" indent="0">
+              <a:buNone/>
+            </a:pPr>
+            <a:r>
+              <a:rPr lang="en-US" sz="1200" b="1" kern="0" spc="200" dirty="0">
                 <a:solidFill>
                   <a:srgbClr val="4F46E5"/>
                 </a:solidFill>
@@ -9863,7 +10140,7 @@
           <a:bodyPr wrap="square" rtlCol="0" anchor="ctr"/>
           <a:lstStyle/>
           <a:p>
-            <a:pPr indent="0" marL="0">
+            <a:pPr marL="0" indent="0">
               <a:buNone/>
             </a:pPr>
             <a:r>
@@ -9902,7 +10179,7 @@
           <a:bodyPr wrap="square" rtlCol="0" anchor="ctr"/>
           <a:lstStyle/>
           <a:p>
-            <a:pPr indent="0" marL="0">
+            <a:pPr marL="0" indent="0">
               <a:buNone/>
             </a:pPr>
             <a:r>
@@ -9941,6 +10218,13 @@
           </a:solidFill>
           <a:ln/>
         </p:spPr>
+        <p:txBody>
+          <a:bodyPr/>
+          <a:lstStyle/>
+          <a:p>
+            <a:endParaRPr lang="en-US"/>
+          </a:p>
+        </p:txBody>
       </p:sp>
       <p:sp>
         <p:nvSpPr>
@@ -9963,7 +10247,7 @@
           <a:bodyPr wrap="square" rtlCol="0" anchor="ctr"/>
           <a:lstStyle/>
           <a:p>
-            <a:pPr indent="0" marL="0">
+            <a:pPr marL="0" indent="0">
               <a:buNone/>
             </a:pPr>
             <a:r>
@@ -10002,7 +10286,7 @@
           <a:bodyPr wrap="square" rtlCol="0" anchor="t"/>
           <a:lstStyle/>
           <a:p>
-            <a:pPr indent="0" marL="0">
+            <a:pPr marL="0" indent="0">
               <a:buNone/>
             </a:pPr>
             <a:r>
@@ -10041,7 +10325,7 @@
           <a:bodyPr wrap="square" rtlCol="0" anchor="t"/>
           <a:lstStyle/>
           <a:p>
-            <a:pPr indent="0" marL="0">
+            <a:pPr marL="0" indent="0">
               <a:buNone/>
             </a:pPr>
             <a:r>
@@ -10080,7 +10364,7 @@
           <a:bodyPr wrap="square" rtlCol="0" anchor="t"/>
           <a:lstStyle/>
           <a:p>
-            <a:pPr indent="0" marL="0">
+            <a:pPr marL="0" indent="0">
               <a:buNone/>
             </a:pPr>
             <a:r>
@@ -10119,6 +10403,13 @@
           </a:solidFill>
           <a:ln/>
         </p:spPr>
+        <p:txBody>
+          <a:bodyPr/>
+          <a:lstStyle/>
+          <a:p>
+            <a:endParaRPr lang="en-US"/>
+          </a:p>
+        </p:txBody>
       </p:sp>
       <p:sp>
         <p:nvSpPr>
@@ -10141,7 +10432,7 @@
           <a:bodyPr wrap="square" rtlCol="0" anchor="ctr"/>
           <a:lstStyle/>
           <a:p>
-            <a:pPr indent="0" marL="0">
+            <a:pPr marL="0" indent="0">
               <a:buNone/>
             </a:pPr>
             <a:r>
@@ -10180,7 +10471,7 @@
           <a:bodyPr wrap="square" rtlCol="0" anchor="t"/>
           <a:lstStyle/>
           <a:p>
-            <a:pPr indent="0" marL="0">
+            <a:pPr marL="0" indent="0">
               <a:buNone/>
             </a:pPr>
             <a:r>
@@ -10219,7 +10510,7 @@
           <a:bodyPr wrap="square" rtlCol="0" anchor="t"/>
           <a:lstStyle/>
           <a:p>
-            <a:pPr indent="0" marL="0">
+            <a:pPr marL="0" indent="0">
               <a:buNone/>
             </a:pPr>
             <a:r>
@@ -10258,7 +10549,7 @@
           <a:bodyPr wrap="square" rtlCol="0" anchor="t"/>
           <a:lstStyle/>
           <a:p>
-            <a:pPr indent="0" marL="0">
+            <a:pPr marL="0" indent="0">
               <a:buNone/>
             </a:pPr>
             <a:r>
@@ -10297,6 +10588,13 @@
           </a:solidFill>
           <a:ln/>
         </p:spPr>
+        <p:txBody>
+          <a:bodyPr/>
+          <a:lstStyle/>
+          <a:p>
+            <a:endParaRPr lang="en-US"/>
+          </a:p>
+        </p:txBody>
       </p:sp>
       <p:sp>
         <p:nvSpPr>
@@ -10319,7 +10617,7 @@
           <a:bodyPr wrap="square" rtlCol="0" anchor="ctr"/>
           <a:lstStyle/>
           <a:p>
-            <a:pPr indent="0" marL="0">
+            <a:pPr marL="0" indent="0">
               <a:buNone/>
             </a:pPr>
             <a:r>
@@ -10358,7 +10656,7 @@
           <a:bodyPr wrap="square" rtlCol="0" anchor="t"/>
           <a:lstStyle/>
           <a:p>
-            <a:pPr indent="0" marL="0">
+            <a:pPr marL="0" indent="0">
               <a:buNone/>
             </a:pPr>
             <a:r>
@@ -10397,7 +10695,7 @@
           <a:bodyPr wrap="square" rtlCol="0" anchor="t"/>
           <a:lstStyle/>
           <a:p>
-            <a:pPr indent="0" marL="0">
+            <a:pPr marL="0" indent="0">
               <a:buNone/>
             </a:pPr>
             <a:r>
@@ -10436,7 +10734,7 @@
           <a:bodyPr wrap="square" rtlCol="0" anchor="t"/>
           <a:lstStyle/>
           <a:p>
-            <a:pPr indent="0" marL="0">
+            <a:pPr marL="0" indent="0">
               <a:buNone/>
             </a:pPr>
             <a:r>
@@ -10475,6 +10773,13 @@
           </a:solidFill>
           <a:ln/>
         </p:spPr>
+        <p:txBody>
+          <a:bodyPr/>
+          <a:lstStyle/>
+          <a:p>
+            <a:endParaRPr lang="en-US"/>
+          </a:p>
+        </p:txBody>
       </p:sp>
       <p:sp>
         <p:nvSpPr>
@@ -10497,7 +10802,7 @@
           <a:bodyPr wrap="square" rtlCol="0" anchor="ctr"/>
           <a:lstStyle/>
           <a:p>
-            <a:pPr indent="0" marL="0">
+            <a:pPr marL="0" indent="0">
               <a:buNone/>
             </a:pPr>
             <a:r>
@@ -10536,7 +10841,7 @@
           <a:bodyPr wrap="square" rtlCol="0" anchor="t"/>
           <a:lstStyle/>
           <a:p>
-            <a:pPr indent="0" marL="0">
+            <a:pPr marL="0" indent="0">
               <a:buNone/>
             </a:pPr>
             <a:r>
@@ -10575,7 +10880,7 @@
           <a:bodyPr wrap="square" rtlCol="0" anchor="t"/>
           <a:lstStyle/>
           <a:p>
-            <a:pPr indent="0" marL="0">
+            <a:pPr marL="0" indent="0">
               <a:buNone/>
             </a:pPr>
             <a:r>
@@ -10614,7 +10919,7 @@
           <a:bodyPr wrap="square" rtlCol="0" anchor="t"/>
           <a:lstStyle/>
           <a:p>
-            <a:pPr indent="0" marL="0">
+            <a:pPr marL="0" indent="0">
               <a:buNone/>
             </a:pPr>
             <a:r>
@@ -10653,6 +10958,13 @@
           </a:solidFill>
           <a:ln/>
         </p:spPr>
+        <p:txBody>
+          <a:bodyPr/>
+          <a:lstStyle/>
+          <a:p>
+            <a:endParaRPr lang="en-US"/>
+          </a:p>
+        </p:txBody>
       </p:sp>
       <p:sp>
         <p:nvSpPr>
@@ -10675,7 +10987,7 @@
           <a:bodyPr wrap="square" rtlCol="0" anchor="ctr"/>
           <a:lstStyle/>
           <a:p>
-            <a:pPr indent="0" marL="0">
+            <a:pPr marL="0" indent="0">
               <a:buNone/>
             </a:pPr>
             <a:r>
@@ -10714,7 +11026,7 @@
           <a:bodyPr wrap="square" rtlCol="0" anchor="t"/>
           <a:lstStyle/>
           <a:p>
-            <a:pPr indent="0" marL="0">
+            <a:pPr marL="0" indent="0">
               <a:buNone/>
             </a:pPr>
             <a:r>
@@ -10753,7 +11065,7 @@
           <a:bodyPr wrap="square" rtlCol="0" anchor="t"/>
           <a:lstStyle/>
           <a:p>
-            <a:pPr indent="0" marL="0">
+            <a:pPr marL="0" indent="0">
               <a:buNone/>
             </a:pPr>
             <a:r>
@@ -10792,7 +11104,7 @@
           <a:bodyPr wrap="square" rtlCol="0" anchor="t"/>
           <a:lstStyle/>
           <a:p>
-            <a:pPr indent="0" marL="0">
+            <a:pPr marL="0" indent="0">
               <a:buNone/>
             </a:pPr>
             <a:r>
@@ -10831,7 +11143,7 @@
           <a:bodyPr wrap="square" rtlCol="0" anchor="ctr"/>
           <a:lstStyle/>
           <a:p>
-            <a:pPr indent="0" marL="0">
+            <a:pPr marL="0" indent="0">
               <a:buNone/>
             </a:pPr>
             <a:r>
@@ -10865,6 +11177,7 @@
         <a:solidFill>
           <a:srgbClr val="FFFFFF"/>
         </a:solidFill>
+        <a:effectLst/>
       </p:bgPr>
     </p:bg>
     <p:spTree>
@@ -10900,6 +11213,13 @@
           </a:solidFill>
           <a:ln/>
         </p:spPr>
+        <p:txBody>
+          <a:bodyPr/>
+          <a:lstStyle/>
+          <a:p>
+            <a:endParaRPr lang="en-US"/>
+          </a:p>
+        </p:txBody>
       </p:sp>
       <p:sp>
         <p:nvSpPr>
@@ -10920,6 +11240,13 @@
           </a:solidFill>
           <a:ln/>
         </p:spPr>
+        <p:txBody>
+          <a:bodyPr/>
+          <a:lstStyle/>
+          <a:p>
+            <a:endParaRPr lang="en-US"/>
+          </a:p>
+        </p:txBody>
       </p:sp>
       <p:sp>
         <p:nvSpPr>
@@ -10942,7 +11269,7 @@
           <a:bodyPr wrap="square" rtlCol="0" anchor="ctr"/>
           <a:lstStyle/>
           <a:p>
-            <a:pPr algn="r" indent="0" marL="0">
+            <a:pPr marL="0" indent="0" algn="r">
               <a:buNone/>
             </a:pPr>
             <a:r>
@@ -10981,11 +11308,11 @@
           <a:bodyPr wrap="square" rtlCol="0" anchor="ctr"/>
           <a:lstStyle/>
           <a:p>
-            <a:pPr indent="0" marL="0">
-              <a:buNone/>
-            </a:pPr>
-            <a:r>
-              <a:rPr lang="en-US" sz="1200" b="1" spc="200" kern="0" dirty="0">
+            <a:pPr marL="0" indent="0">
+              <a:buNone/>
+            </a:pPr>
+            <a:r>
+              <a:rPr lang="en-US" sz="1200" b="1" kern="0" spc="200" dirty="0">
                 <a:solidFill>
                   <a:srgbClr val="4F46E5"/>
                 </a:solidFill>
@@ -11020,7 +11347,7 @@
           <a:bodyPr wrap="square" rtlCol="0" anchor="ctr"/>
           <a:lstStyle/>
           <a:p>
-            <a:pPr indent="0" marL="0">
+            <a:pPr marL="0" indent="0">
               <a:buNone/>
             </a:pPr>
             <a:r>
@@ -11059,7 +11386,7 @@
           <a:bodyPr wrap="square" rtlCol="0" anchor="ctr"/>
           <a:lstStyle/>
           <a:p>
-            <a:pPr indent="0" marL="0">
+            <a:pPr marL="0" indent="0">
               <a:lnSpc>
                 <a:spcPct val="135000"/>
               </a:lnSpc>
@@ -11099,6 +11426,13 @@
           </a:solidFill>
           <a:ln/>
         </p:spPr>
+        <p:txBody>
+          <a:bodyPr/>
+          <a:lstStyle/>
+          <a:p>
+            <a:endParaRPr lang="en-US"/>
+          </a:p>
+        </p:txBody>
       </p:sp>
       <p:sp>
         <p:nvSpPr>
@@ -11121,7 +11455,7 @@
           <a:bodyPr wrap="square" rtlCol="0" anchor="ctr"/>
           <a:lstStyle/>
           <a:p>
-            <a:pPr indent="0" marL="0">
+            <a:pPr marL="0" indent="0">
               <a:buNone/>
             </a:pPr>
             <a:r>
@@ -11158,6 +11492,13 @@
           </a:solidFill>
           <a:ln/>
         </p:spPr>
+        <p:txBody>
+          <a:bodyPr/>
+          <a:lstStyle/>
+          <a:p>
+            <a:endParaRPr lang="en-US"/>
+          </a:p>
+        </p:txBody>
       </p:sp>
       <p:sp>
         <p:nvSpPr>
@@ -11180,7 +11521,7 @@
           <a:bodyPr wrap="square" rtlCol="0" anchor="ctr"/>
           <a:lstStyle/>
           <a:p>
-            <a:pPr indent="0" marL="0">
+            <a:pPr marL="0" indent="0">
               <a:buNone/>
             </a:pPr>
             <a:r>
@@ -11217,6 +11558,13 @@
           </a:solidFill>
           <a:ln/>
         </p:spPr>
+        <p:txBody>
+          <a:bodyPr/>
+          <a:lstStyle/>
+          <a:p>
+            <a:endParaRPr lang="en-US"/>
+          </a:p>
+        </p:txBody>
       </p:sp>
       <p:sp>
         <p:nvSpPr>
@@ -11239,7 +11587,7 @@
           <a:bodyPr wrap="square" rtlCol="0" anchor="ctr"/>
           <a:lstStyle/>
           <a:p>
-            <a:pPr indent="0" marL="0">
+            <a:pPr marL="0" indent="0">
               <a:buNone/>
             </a:pPr>
             <a:r>
@@ -11276,6 +11624,13 @@
           </a:solidFill>
           <a:ln/>
         </p:spPr>
+        <p:txBody>
+          <a:bodyPr/>
+          <a:lstStyle/>
+          <a:p>
+            <a:endParaRPr lang="en-US"/>
+          </a:p>
+        </p:txBody>
       </p:sp>
       <p:sp>
         <p:nvSpPr>
@@ -11298,7 +11653,7 @@
           <a:bodyPr wrap="square" rtlCol="0" anchor="ctr"/>
           <a:lstStyle/>
           <a:p>
-            <a:pPr indent="0" marL="0">
+            <a:pPr marL="0" indent="0">
               <a:buNone/>
             </a:pPr>
             <a:r>
@@ -11318,15 +11673,15 @@
       </p:sp>
       <p:pic>
         <p:nvPicPr>
-          <p:cNvPr id="16" name="Image 0" descr="/home/claude/work/build/assets/screenshot_sprint1_registration.png">    </p:cNvPr>
+          <p:cNvPr id="16" name="Image 0" descr="/home/claude/work/build/assets/screenshot_sprint1_registration.png"/>
           <p:cNvPicPr>
             <a:picLocks noChangeAspect="1"/>
           </p:cNvPicPr>
           <p:nvPr/>
         </p:nvPicPr>
         <p:blipFill>
-          <a:blip r:embed="rId1"/>
-          <a:srcRect l="0" r="0" t="0" b="0"/>
+          <a:blip r:embed="rId3"/>
+          <a:srcRect/>
           <a:stretch/>
         </p:blipFill>
         <p:spPr>
@@ -11360,6 +11715,13 @@
             <a:prstDash val="solid"/>
           </a:ln>
         </p:spPr>
+        <p:txBody>
+          <a:bodyPr/>
+          <a:lstStyle/>
+          <a:p>
+            <a:endParaRPr lang="en-US"/>
+          </a:p>
+        </p:txBody>
       </p:sp>
     </p:spTree>
   </p:cSld>
@@ -11377,6 +11739,7 @@
         <a:solidFill>
           <a:srgbClr val="FFFFFF"/>
         </a:solidFill>
+        <a:effectLst/>
       </p:bgPr>
     </p:bg>
     <p:spTree>
@@ -11412,6 +11775,13 @@
           </a:solidFill>
           <a:ln/>
         </p:spPr>
+        <p:txBody>
+          <a:bodyPr/>
+          <a:lstStyle/>
+          <a:p>
+            <a:endParaRPr lang="en-US"/>
+          </a:p>
+        </p:txBody>
       </p:sp>
       <p:sp>
         <p:nvSpPr>
@@ -11432,6 +11802,13 @@
           </a:solidFill>
           <a:ln/>
         </p:spPr>
+        <p:txBody>
+          <a:bodyPr/>
+          <a:lstStyle/>
+          <a:p>
+            <a:endParaRPr lang="en-US"/>
+          </a:p>
+        </p:txBody>
       </p:sp>
       <p:sp>
         <p:nvSpPr>
@@ -11454,7 +11831,7 @@
           <a:bodyPr wrap="square" rtlCol="0" anchor="ctr"/>
           <a:lstStyle/>
           <a:p>
-            <a:pPr algn="r" indent="0" marL="0">
+            <a:pPr marL="0" indent="0" algn="r">
               <a:buNone/>
             </a:pPr>
             <a:r>
@@ -11493,11 +11870,11 @@
           <a:bodyPr wrap="square" rtlCol="0" anchor="ctr"/>
           <a:lstStyle/>
           <a:p>
-            <a:pPr indent="0" marL="0">
-              <a:buNone/>
-            </a:pPr>
-            <a:r>
-              <a:rPr lang="en-US" sz="1200" b="1" spc="200" kern="0" dirty="0">
+            <a:pPr marL="0" indent="0">
+              <a:buNone/>
+            </a:pPr>
+            <a:r>
+              <a:rPr lang="en-US" sz="1200" b="1" kern="0" spc="200" dirty="0">
                 <a:solidFill>
                   <a:srgbClr val="4F46E5"/>
                 </a:solidFill>
@@ -11532,7 +11909,7 @@
           <a:bodyPr wrap="square" rtlCol="0" anchor="ctr"/>
           <a:lstStyle/>
           <a:p>
-            <a:pPr indent="0" marL="0">
+            <a:pPr marL="0" indent="0">
               <a:buNone/>
             </a:pPr>
             <a:r>
@@ -11571,6 +11948,13 @@
           </a:solidFill>
           <a:ln/>
         </p:spPr>
+        <p:txBody>
+          <a:bodyPr/>
+          <a:lstStyle/>
+          <a:p>
+            <a:endParaRPr lang="en-US"/>
+          </a:p>
+        </p:txBody>
       </p:sp>
       <p:sp>
         <p:nvSpPr>
@@ -11591,6 +11975,13 @@
           </a:solidFill>
           <a:ln/>
         </p:spPr>
+        <p:txBody>
+          <a:bodyPr/>
+          <a:lstStyle/>
+          <a:p>
+            <a:endParaRPr lang="en-US"/>
+          </a:p>
+        </p:txBody>
       </p:sp>
       <p:sp>
         <p:nvSpPr>
@@ -11613,7 +12004,7 @@
           <a:bodyPr wrap="square" rtlCol="0" anchor="ctr"/>
           <a:lstStyle/>
           <a:p>
-            <a:pPr algn="ctr" indent="0" marL="0">
+            <a:pPr marL="0" indent="0" algn="ctr">
               <a:buNone/>
             </a:pPr>
             <a:r>
@@ -11652,7 +12043,7 @@
           <a:bodyPr wrap="square" rtlCol="0" anchor="ctr"/>
           <a:lstStyle/>
           <a:p>
-            <a:pPr indent="0" marL="0">
+            <a:pPr marL="0" indent="0">
               <a:buNone/>
             </a:pPr>
             <a:r>
@@ -11691,6 +12082,13 @@
           </a:solidFill>
           <a:ln/>
         </p:spPr>
+        <p:txBody>
+          <a:bodyPr/>
+          <a:lstStyle/>
+          <a:p>
+            <a:endParaRPr lang="en-US"/>
+          </a:p>
+        </p:txBody>
       </p:sp>
       <p:sp>
         <p:nvSpPr>
@@ -11711,6 +12109,13 @@
           </a:solidFill>
           <a:ln/>
         </p:spPr>
+        <p:txBody>
+          <a:bodyPr/>
+          <a:lstStyle/>
+          <a:p>
+            <a:endParaRPr lang="en-US"/>
+          </a:p>
+        </p:txBody>
       </p:sp>
       <p:sp>
         <p:nvSpPr>
@@ -11733,7 +12138,7 @@
           <a:bodyPr wrap="square" rtlCol="0" anchor="ctr"/>
           <a:lstStyle/>
           <a:p>
-            <a:pPr algn="ctr" indent="0" marL="0">
+            <a:pPr marL="0" indent="0" algn="ctr">
               <a:buNone/>
             </a:pPr>
             <a:r>
@@ -11772,7 +12177,7 @@
           <a:bodyPr wrap="square" rtlCol="0" anchor="ctr"/>
           <a:lstStyle/>
           <a:p>
-            <a:pPr indent="0" marL="0">
+            <a:pPr marL="0" indent="0">
               <a:buNone/>
             </a:pPr>
             <a:r>
@@ -11811,6 +12216,13 @@
           </a:solidFill>
           <a:ln/>
         </p:spPr>
+        <p:txBody>
+          <a:bodyPr/>
+          <a:lstStyle/>
+          <a:p>
+            <a:endParaRPr lang="en-US"/>
+          </a:p>
+        </p:txBody>
       </p:sp>
       <p:sp>
         <p:nvSpPr>
@@ -11831,6 +12243,13 @@
           </a:solidFill>
           <a:ln/>
         </p:spPr>
+        <p:txBody>
+          <a:bodyPr/>
+          <a:lstStyle/>
+          <a:p>
+            <a:endParaRPr lang="en-US"/>
+          </a:p>
+        </p:txBody>
       </p:sp>
       <p:sp>
         <p:nvSpPr>
@@ -11853,7 +12272,7 @@
           <a:bodyPr wrap="square" rtlCol="0" anchor="ctr"/>
           <a:lstStyle/>
           <a:p>
-            <a:pPr algn="ctr" indent="0" marL="0">
+            <a:pPr marL="0" indent="0" algn="ctr">
               <a:buNone/>
             </a:pPr>
             <a:r>
@@ -11892,7 +12311,7 @@
           <a:bodyPr wrap="square" rtlCol="0" anchor="ctr"/>
           <a:lstStyle/>
           <a:p>
-            <a:pPr indent="0" marL="0">
+            <a:pPr marL="0" indent="0">
               <a:buNone/>
             </a:pPr>
             <a:r>
@@ -11931,6 +12350,13 @@
           </a:solidFill>
           <a:ln/>
         </p:spPr>
+        <p:txBody>
+          <a:bodyPr/>
+          <a:lstStyle/>
+          <a:p>
+            <a:endParaRPr lang="en-US"/>
+          </a:p>
+        </p:txBody>
       </p:sp>
       <p:sp>
         <p:nvSpPr>
@@ -11951,6 +12377,13 @@
           </a:solidFill>
           <a:ln/>
         </p:spPr>
+        <p:txBody>
+          <a:bodyPr/>
+          <a:lstStyle/>
+          <a:p>
+            <a:endParaRPr lang="en-US"/>
+          </a:p>
+        </p:txBody>
       </p:sp>
       <p:sp>
         <p:nvSpPr>
@@ -11973,7 +12406,7 @@
           <a:bodyPr wrap="square" rtlCol="0" anchor="ctr"/>
           <a:lstStyle/>
           <a:p>
-            <a:pPr algn="ctr" indent="0" marL="0">
+            <a:pPr marL="0" indent="0" algn="ctr">
               <a:buNone/>
             </a:pPr>
             <a:r>
@@ -12012,7 +12445,7 @@
           <a:bodyPr wrap="square" rtlCol="0" anchor="ctr"/>
           <a:lstStyle/>
           <a:p>
-            <a:pPr indent="0" marL="0">
+            <a:pPr marL="0" indent="0">
               <a:buNone/>
             </a:pPr>
             <a:r>
@@ -12051,6 +12484,13 @@
           </a:solidFill>
           <a:ln/>
         </p:spPr>
+        <p:txBody>
+          <a:bodyPr/>
+          <a:lstStyle/>
+          <a:p>
+            <a:endParaRPr lang="en-US"/>
+          </a:p>
+        </p:txBody>
       </p:sp>
       <p:sp>
         <p:nvSpPr>
@@ -12071,6 +12511,13 @@
           </a:solidFill>
           <a:ln/>
         </p:spPr>
+        <p:txBody>
+          <a:bodyPr/>
+          <a:lstStyle/>
+          <a:p>
+            <a:endParaRPr lang="en-US"/>
+          </a:p>
+        </p:txBody>
       </p:sp>
       <p:sp>
         <p:nvSpPr>
@@ -12093,7 +12540,7 @@
           <a:bodyPr wrap="square" rtlCol="0" anchor="ctr"/>
           <a:lstStyle/>
           <a:p>
-            <a:pPr algn="ctr" indent="0" marL="0">
+            <a:pPr marL="0" indent="0" algn="ctr">
               <a:buNone/>
             </a:pPr>
             <a:r>
@@ -12132,7 +12579,7 @@
           <a:bodyPr wrap="square" rtlCol="0" anchor="ctr"/>
           <a:lstStyle/>
           <a:p>
-            <a:pPr indent="0" marL="0">
+            <a:pPr marL="0" indent="0">
               <a:buNone/>
             </a:pPr>
             <a:r>
@@ -12166,6 +12613,7 @@
         <a:solidFill>
           <a:srgbClr val="FFFFFF"/>
         </a:solidFill>
+        <a:effectLst/>
       </p:bgPr>
     </p:bg>
     <p:spTree>
@@ -12201,6 +12649,13 @@
           </a:solidFill>
           <a:ln/>
         </p:spPr>
+        <p:txBody>
+          <a:bodyPr/>
+          <a:lstStyle/>
+          <a:p>
+            <a:endParaRPr lang="en-US"/>
+          </a:p>
+        </p:txBody>
       </p:sp>
       <p:sp>
         <p:nvSpPr>
@@ -12221,6 +12676,13 @@
           </a:solidFill>
           <a:ln/>
         </p:spPr>
+        <p:txBody>
+          <a:bodyPr/>
+          <a:lstStyle/>
+          <a:p>
+            <a:endParaRPr lang="en-US"/>
+          </a:p>
+        </p:txBody>
       </p:sp>
       <p:sp>
         <p:nvSpPr>
@@ -12243,7 +12705,7 @@
           <a:bodyPr wrap="square" rtlCol="0" anchor="ctr"/>
           <a:lstStyle/>
           <a:p>
-            <a:pPr algn="r" indent="0" marL="0">
+            <a:pPr marL="0" indent="0" algn="r">
               <a:buNone/>
             </a:pPr>
             <a:r>
@@ -12282,11 +12744,11 @@
           <a:bodyPr wrap="square" rtlCol="0" anchor="ctr"/>
           <a:lstStyle/>
           <a:p>
-            <a:pPr indent="0" marL="0">
-              <a:buNone/>
-            </a:pPr>
-            <a:r>
-              <a:rPr lang="en-US" sz="1200" b="1" spc="200" kern="0" dirty="0">
+            <a:pPr marL="0" indent="0">
+              <a:buNone/>
+            </a:pPr>
+            <a:r>
+              <a:rPr lang="en-US" sz="1200" b="1" kern="0" spc="200" dirty="0">
                 <a:solidFill>
                   <a:srgbClr val="4F46E5"/>
                 </a:solidFill>
@@ -12321,7 +12783,7 @@
           <a:bodyPr wrap="square" rtlCol="0" anchor="ctr"/>
           <a:lstStyle/>
           <a:p>
-            <a:pPr indent="0" marL="0">
+            <a:pPr marL="0" indent="0">
               <a:buNone/>
             </a:pPr>
             <a:r>
@@ -12360,6 +12822,13 @@
           </a:solidFill>
           <a:ln/>
         </p:spPr>
+        <p:txBody>
+          <a:bodyPr/>
+          <a:lstStyle/>
+          <a:p>
+            <a:endParaRPr lang="en-US"/>
+          </a:p>
+        </p:txBody>
       </p:sp>
       <p:sp>
         <p:nvSpPr>
@@ -12380,6 +12849,13 @@
           </a:solidFill>
           <a:ln/>
         </p:spPr>
+        <p:txBody>
+          <a:bodyPr/>
+          <a:lstStyle/>
+          <a:p>
+            <a:endParaRPr lang="en-US"/>
+          </a:p>
+        </p:txBody>
       </p:sp>
       <p:sp>
         <p:nvSpPr>
@@ -12402,7 +12878,7 @@
           <a:bodyPr wrap="square" rtlCol="0" anchor="ctr"/>
           <a:lstStyle/>
           <a:p>
-            <a:pPr indent="0" marL="0">
+            <a:pPr marL="0" indent="0">
               <a:buNone/>
             </a:pPr>
             <a:r>
@@ -12441,7 +12917,7 @@
           <a:bodyPr wrap="square" rtlCol="0" anchor="ctr"/>
           <a:lstStyle/>
           <a:p>
-            <a:pPr indent="0" marL="0">
+            <a:pPr marL="0" indent="0">
               <a:lnSpc>
                 <a:spcPct val="120000"/>
               </a:lnSpc>
@@ -12483,6 +12959,13 @@
           </a:solidFill>
           <a:ln/>
         </p:spPr>
+        <p:txBody>
+          <a:bodyPr/>
+          <a:lstStyle/>
+          <a:p>
+            <a:endParaRPr lang="en-US"/>
+          </a:p>
+        </p:txBody>
       </p:sp>
       <p:sp>
         <p:nvSpPr>
@@ -12503,6 +12986,13 @@
           </a:solidFill>
           <a:ln/>
         </p:spPr>
+        <p:txBody>
+          <a:bodyPr/>
+          <a:lstStyle/>
+          <a:p>
+            <a:endParaRPr lang="en-US"/>
+          </a:p>
+        </p:txBody>
       </p:sp>
       <p:sp>
         <p:nvSpPr>
@@ -12525,7 +13015,7 @@
           <a:bodyPr wrap="square" rtlCol="0" anchor="ctr"/>
           <a:lstStyle/>
           <a:p>
-            <a:pPr indent="0" marL="0">
+            <a:pPr marL="0" indent="0">
               <a:buNone/>
             </a:pPr>
             <a:r>
@@ -12564,7 +13054,7 @@
           <a:bodyPr wrap="square" rtlCol="0" anchor="ctr"/>
           <a:lstStyle/>
           <a:p>
-            <a:pPr indent="0" marL="0">
+            <a:pPr marL="0" indent="0">
               <a:lnSpc>
                 <a:spcPct val="120000"/>
               </a:lnSpc>
@@ -12606,6 +13096,13 @@
           </a:solidFill>
           <a:ln/>
         </p:spPr>
+        <p:txBody>
+          <a:bodyPr/>
+          <a:lstStyle/>
+          <a:p>
+            <a:endParaRPr lang="en-US"/>
+          </a:p>
+        </p:txBody>
       </p:sp>
       <p:sp>
         <p:nvSpPr>
@@ -12626,6 +13123,13 @@
           </a:solidFill>
           <a:ln/>
         </p:spPr>
+        <p:txBody>
+          <a:bodyPr/>
+          <a:lstStyle/>
+          <a:p>
+            <a:endParaRPr lang="en-US"/>
+          </a:p>
+        </p:txBody>
       </p:sp>
       <p:sp>
         <p:nvSpPr>
@@ -12648,7 +13152,7 @@
           <a:bodyPr wrap="square" rtlCol="0" anchor="ctr"/>
           <a:lstStyle/>
           <a:p>
-            <a:pPr indent="0" marL="0">
+            <a:pPr marL="0" indent="0">
               <a:buNone/>
             </a:pPr>
             <a:r>
@@ -12687,7 +13191,7 @@
           <a:bodyPr wrap="square" rtlCol="0" anchor="ctr"/>
           <a:lstStyle/>
           <a:p>
-            <a:pPr indent="0" marL="0">
+            <a:pPr marL="0" indent="0">
               <a:lnSpc>
                 <a:spcPct val="120000"/>
               </a:lnSpc>
@@ -12729,6 +13233,13 @@
           </a:solidFill>
           <a:ln/>
         </p:spPr>
+        <p:txBody>
+          <a:bodyPr/>
+          <a:lstStyle/>
+          <a:p>
+            <a:endParaRPr lang="en-US"/>
+          </a:p>
+        </p:txBody>
       </p:sp>
       <p:sp>
         <p:nvSpPr>
@@ -12749,6 +13260,13 @@
           </a:solidFill>
           <a:ln/>
         </p:spPr>
+        <p:txBody>
+          <a:bodyPr/>
+          <a:lstStyle/>
+          <a:p>
+            <a:endParaRPr lang="en-US"/>
+          </a:p>
+        </p:txBody>
       </p:sp>
       <p:sp>
         <p:nvSpPr>
@@ -12771,7 +13289,7 @@
           <a:bodyPr wrap="square" rtlCol="0" anchor="ctr"/>
           <a:lstStyle/>
           <a:p>
-            <a:pPr indent="0" marL="0">
+            <a:pPr marL="0" indent="0">
               <a:buNone/>
             </a:pPr>
             <a:r>
@@ -12810,7 +13328,7 @@
           <a:bodyPr wrap="square" rtlCol="0" anchor="ctr"/>
           <a:lstStyle/>
           <a:p>
-            <a:pPr indent="0" marL="0">
+            <a:pPr marL="0" indent="0">
               <a:lnSpc>
                 <a:spcPct val="120000"/>
               </a:lnSpc>
@@ -12852,6 +13370,13 @@
           </a:solidFill>
           <a:ln/>
         </p:spPr>
+        <p:txBody>
+          <a:bodyPr/>
+          <a:lstStyle/>
+          <a:p>
+            <a:endParaRPr lang="en-US"/>
+          </a:p>
+        </p:txBody>
       </p:sp>
       <p:sp>
         <p:nvSpPr>
@@ -12872,6 +13397,13 @@
           </a:solidFill>
           <a:ln/>
         </p:spPr>
+        <p:txBody>
+          <a:bodyPr/>
+          <a:lstStyle/>
+          <a:p>
+            <a:endParaRPr lang="en-US"/>
+          </a:p>
+        </p:txBody>
       </p:sp>
       <p:sp>
         <p:nvSpPr>
@@ -12894,7 +13426,7 @@
           <a:bodyPr wrap="square" rtlCol="0" anchor="ctr"/>
           <a:lstStyle/>
           <a:p>
-            <a:pPr indent="0" marL="0">
+            <a:pPr marL="0" indent="0">
               <a:buNone/>
             </a:pPr>
             <a:r>
@@ -12933,7 +13465,7 @@
           <a:bodyPr wrap="square" rtlCol="0" anchor="ctr"/>
           <a:lstStyle/>
           <a:p>
-            <a:pPr indent="0" marL="0">
+            <a:pPr marL="0" indent="0">
               <a:lnSpc>
                 <a:spcPct val="120000"/>
               </a:lnSpc>
@@ -12948,7 +13480,7 @@
                 <a:ea typeface="Calibri" pitchFamily="34" charset="-122"/>
                 <a:cs typeface="Calibri" pitchFamily="34" charset="-120"/>
               </a:rPr>
-              <a:t>Moderates users and content, handles support tickets</a:t>
+              <a:t>Moderates users, handles tickets and appeals</a:t>
             </a:r>
             <a:endParaRPr lang="en-US" sz="1150" dirty="0"/>
           </a:p>
@@ -12975,6 +13507,13 @@
           </a:solidFill>
           <a:ln/>
         </p:spPr>
+        <p:txBody>
+          <a:bodyPr/>
+          <a:lstStyle/>
+          <a:p>
+            <a:endParaRPr lang="en-US"/>
+          </a:p>
+        </p:txBody>
       </p:sp>
       <p:sp>
         <p:nvSpPr>
@@ -12995,6 +13534,13 @@
           </a:solidFill>
           <a:ln/>
         </p:spPr>
+        <p:txBody>
+          <a:bodyPr/>
+          <a:lstStyle/>
+          <a:p>
+            <a:endParaRPr lang="en-US"/>
+          </a:p>
+        </p:txBody>
       </p:sp>
       <p:sp>
         <p:nvSpPr>
@@ -13017,7 +13563,7 @@
           <a:bodyPr wrap="square" rtlCol="0" anchor="ctr"/>
           <a:lstStyle/>
           <a:p>
-            <a:pPr indent="0" marL="0">
+            <a:pPr marL="0" indent="0">
               <a:buNone/>
             </a:pPr>
             <a:r>
@@ -13056,7 +13602,7 @@
           <a:bodyPr wrap="square" rtlCol="0" anchor="ctr"/>
           <a:lstStyle/>
           <a:p>
-            <a:pPr indent="0" marL="0">
+            <a:pPr marL="0" indent="0">
               <a:lnSpc>
                 <a:spcPct val="120000"/>
               </a:lnSpc>
@@ -13071,7 +13617,7 @@
                 <a:ea typeface="Calibri" pitchFamily="34" charset="-122"/>
                 <a:cs typeface="Calibri" pitchFamily="34" charset="-120"/>
               </a:rPr>
-              <a:t>Promotes/demotes admins, reviews suspension appeals</a:t>
+              <a:t>Promotes/demotes users, deletes accounts, edits user info</a:t>
             </a:r>
             <a:endParaRPr lang="en-US" sz="1150" dirty="0"/>
           </a:p>
@@ -13093,6 +13639,7 @@
         <a:solidFill>
           <a:srgbClr val="FFFFFF"/>
         </a:solidFill>
+        <a:effectLst/>
       </p:bgPr>
     </p:bg>
     <p:spTree>
@@ -13128,6 +13675,13 @@
           </a:solidFill>
           <a:ln/>
         </p:spPr>
+        <p:txBody>
+          <a:bodyPr/>
+          <a:lstStyle/>
+          <a:p>
+            <a:endParaRPr lang="en-US"/>
+          </a:p>
+        </p:txBody>
       </p:sp>
       <p:sp>
         <p:nvSpPr>
@@ -13148,6 +13702,13 @@
           </a:solidFill>
           <a:ln/>
         </p:spPr>
+        <p:txBody>
+          <a:bodyPr/>
+          <a:lstStyle/>
+          <a:p>
+            <a:endParaRPr lang="en-US"/>
+          </a:p>
+        </p:txBody>
       </p:sp>
       <p:sp>
         <p:nvSpPr>
@@ -13170,7 +13731,7 @@
           <a:bodyPr wrap="square" rtlCol="0" anchor="ctr"/>
           <a:lstStyle/>
           <a:p>
-            <a:pPr algn="r" indent="0" marL="0">
+            <a:pPr marL="0" indent="0" algn="r">
               <a:buNone/>
             </a:pPr>
             <a:r>
@@ -13209,11 +13770,11 @@
           <a:bodyPr wrap="square" rtlCol="0" anchor="ctr"/>
           <a:lstStyle/>
           <a:p>
-            <a:pPr indent="0" marL="0">
-              <a:buNone/>
-            </a:pPr>
-            <a:r>
-              <a:rPr lang="en-US" sz="1200" b="1" spc="200" kern="0" dirty="0">
+            <a:pPr marL="0" indent="0">
+              <a:buNone/>
+            </a:pPr>
+            <a:r>
+              <a:rPr lang="en-US" sz="1200" b="1" kern="0" spc="200" dirty="0">
                 <a:solidFill>
                   <a:srgbClr val="4F46E5"/>
                 </a:solidFill>
@@ -13248,7 +13809,7 @@
           <a:bodyPr wrap="square" rtlCol="0" anchor="ctr"/>
           <a:lstStyle/>
           <a:p>
-            <a:pPr indent="0" marL="0">
+            <a:pPr marL="0" indent="0">
               <a:buNone/>
             </a:pPr>
             <a:r>
@@ -13287,7 +13848,7 @@
           <a:bodyPr wrap="square" rtlCol="0" anchor="ctr"/>
           <a:lstStyle/>
           <a:p>
-            <a:pPr indent="0" marL="0">
+            <a:pPr marL="0" indent="0">
               <a:buNone/>
             </a:pPr>
             <a:r>
@@ -13326,7 +13887,7 @@
           <a:bodyPr wrap="square" rtlCol="0" anchor="ctr"/>
           <a:lstStyle/>
           <a:p>
-            <a:pPr indent="0" marL="0">
+            <a:pPr marL="0" indent="0">
               <a:lnSpc>
                 <a:spcPct val="135000"/>
               </a:lnSpc>
@@ -13368,7 +13929,7 @@
           <a:bodyPr wrap="square" rtlCol="0" anchor="ctr"/>
           <a:lstStyle/>
           <a:p>
-            <a:pPr indent="0" marL="0">
+            <a:pPr marL="0" indent="0">
               <a:buNone/>
             </a:pPr>
             <a:r>
@@ -13407,6 +13968,13 @@
           </a:solidFill>
           <a:ln/>
         </p:spPr>
+        <p:txBody>
+          <a:bodyPr/>
+          <a:lstStyle/>
+          <a:p>
+            <a:endParaRPr lang="en-US"/>
+          </a:p>
+        </p:txBody>
       </p:sp>
       <p:sp>
         <p:nvSpPr>
@@ -13429,7 +13997,7 @@
           <a:bodyPr wrap="square" rtlCol="0" anchor="ctr"/>
           <a:lstStyle/>
           <a:p>
-            <a:pPr algn="ctr" indent="0" marL="0">
+            <a:pPr marL="0" indent="0" algn="ctr">
               <a:buNone/>
             </a:pPr>
             <a:r>
@@ -13468,6 +14036,13 @@
           </a:solidFill>
           <a:ln/>
         </p:spPr>
+        <p:txBody>
+          <a:bodyPr/>
+          <a:lstStyle/>
+          <a:p>
+            <a:endParaRPr lang="en-US"/>
+          </a:p>
+        </p:txBody>
       </p:sp>
       <p:sp>
         <p:nvSpPr>
@@ -13490,7 +14065,7 @@
           <a:bodyPr wrap="square" rtlCol="0" anchor="ctr"/>
           <a:lstStyle/>
           <a:p>
-            <a:pPr algn="ctr" indent="0" marL="0">
+            <a:pPr marL="0" indent="0" algn="ctr">
               <a:buNone/>
             </a:pPr>
             <a:r>
@@ -13529,6 +14104,13 @@
           </a:solidFill>
           <a:ln/>
         </p:spPr>
+        <p:txBody>
+          <a:bodyPr/>
+          <a:lstStyle/>
+          <a:p>
+            <a:endParaRPr lang="en-US"/>
+          </a:p>
+        </p:txBody>
       </p:sp>
       <p:sp>
         <p:nvSpPr>
@@ -13551,7 +14133,7 @@
           <a:bodyPr wrap="square" rtlCol="0" anchor="ctr"/>
           <a:lstStyle/>
           <a:p>
-            <a:pPr algn="ctr" indent="0" marL="0">
+            <a:pPr marL="0" indent="0" algn="ctr">
               <a:buNone/>
             </a:pPr>
             <a:r>
@@ -13590,6 +14172,13 @@
           </a:solidFill>
           <a:ln/>
         </p:spPr>
+        <p:txBody>
+          <a:bodyPr/>
+          <a:lstStyle/>
+          <a:p>
+            <a:endParaRPr lang="en-US"/>
+          </a:p>
+        </p:txBody>
       </p:sp>
       <p:sp>
         <p:nvSpPr>
@@ -13612,7 +14201,7 @@
           <a:bodyPr wrap="square" rtlCol="0" anchor="ctr"/>
           <a:lstStyle/>
           <a:p>
-            <a:pPr algn="ctr" indent="0" marL="0">
+            <a:pPr marL="0" indent="0" algn="ctr">
               <a:buNone/>
             </a:pPr>
             <a:r>
@@ -13651,6 +14240,13 @@
           </a:solidFill>
           <a:ln/>
         </p:spPr>
+        <p:txBody>
+          <a:bodyPr/>
+          <a:lstStyle/>
+          <a:p>
+            <a:endParaRPr lang="en-US"/>
+          </a:p>
+        </p:txBody>
       </p:sp>
       <p:sp>
         <p:nvSpPr>
@@ -13673,7 +14269,7 @@
           <a:bodyPr wrap="square" rtlCol="0" anchor="ctr"/>
           <a:lstStyle/>
           <a:p>
-            <a:pPr algn="ctr" indent="0" marL="0">
+            <a:pPr marL="0" indent="0" algn="ctr">
               <a:buNone/>
             </a:pPr>
             <a:r>
@@ -13712,6 +14308,13 @@
           </a:solidFill>
           <a:ln/>
         </p:spPr>
+        <p:txBody>
+          <a:bodyPr/>
+          <a:lstStyle/>
+          <a:p>
+            <a:endParaRPr lang="en-US"/>
+          </a:p>
+        </p:txBody>
       </p:sp>
       <p:sp>
         <p:nvSpPr>
@@ -13734,7 +14337,7 @@
           <a:bodyPr wrap="square" rtlCol="0" anchor="ctr"/>
           <a:lstStyle/>
           <a:p>
-            <a:pPr algn="ctr" indent="0" marL="0">
+            <a:pPr marL="0" indent="0" algn="ctr">
               <a:buNone/>
             </a:pPr>
             <a:r>
@@ -13754,15 +14357,15 @@
       </p:sp>
       <p:pic>
         <p:nvPicPr>
-          <p:cNvPr id="22" name="Image 0" descr="/home/claude/work/build/assets/fig_uc_general.png">    </p:cNvPr>
+          <p:cNvPr id="22" name="Image 0" descr="/home/claude/work/build/assets/fig_uc_general.png"/>
           <p:cNvPicPr>
             <a:picLocks noChangeAspect="1"/>
           </p:cNvPicPr>
           <p:nvPr/>
         </p:nvPicPr>
         <p:blipFill>
-          <a:blip r:embed="rId1"/>
-          <a:srcRect l="0" r="0" t="0" b="0"/>
+          <a:blip r:embed="rId3"/>
+          <a:srcRect/>
           <a:stretch/>
         </p:blipFill>
         <p:spPr>
@@ -13791,6 +14394,7 @@
         <a:solidFill>
           <a:srgbClr val="FFFFFF"/>
         </a:solidFill>
+        <a:effectLst/>
       </p:bgPr>
     </p:bg>
     <p:spTree>
@@ -13826,6 +14430,13 @@
           </a:solidFill>
           <a:ln/>
         </p:spPr>
+        <p:txBody>
+          <a:bodyPr/>
+          <a:lstStyle/>
+          <a:p>
+            <a:endParaRPr lang="en-US"/>
+          </a:p>
+        </p:txBody>
       </p:sp>
       <p:sp>
         <p:nvSpPr>
@@ -13846,6 +14457,13 @@
           </a:solidFill>
           <a:ln/>
         </p:spPr>
+        <p:txBody>
+          <a:bodyPr/>
+          <a:lstStyle/>
+          <a:p>
+            <a:endParaRPr lang="en-US"/>
+          </a:p>
+        </p:txBody>
       </p:sp>
       <p:sp>
         <p:nvSpPr>
@@ -13868,7 +14486,7 @@
           <a:bodyPr wrap="square" rtlCol="0" anchor="ctr"/>
           <a:lstStyle/>
           <a:p>
-            <a:pPr algn="r" indent="0" marL="0">
+            <a:pPr marL="0" indent="0" algn="r">
               <a:buNone/>
             </a:pPr>
             <a:r>
@@ -13907,11 +14525,11 @@
           <a:bodyPr wrap="square" rtlCol="0" anchor="ctr"/>
           <a:lstStyle/>
           <a:p>
-            <a:pPr indent="0" marL="0">
-              <a:buNone/>
-            </a:pPr>
-            <a:r>
-              <a:rPr lang="en-US" sz="1200" b="1" spc="200" kern="0" dirty="0">
+            <a:pPr marL="0" indent="0">
+              <a:buNone/>
+            </a:pPr>
+            <a:r>
+              <a:rPr lang="en-US" sz="1200" b="1" kern="0" spc="200" dirty="0">
                 <a:solidFill>
                   <a:srgbClr val="4F46E5"/>
                 </a:solidFill>
@@ -13946,7 +14564,7 @@
           <a:bodyPr wrap="square" rtlCol="0" anchor="ctr"/>
           <a:lstStyle/>
           <a:p>
-            <a:pPr indent="0" marL="0">
+            <a:pPr marL="0" indent="0">
               <a:buNone/>
             </a:pPr>
             <a:r>
@@ -13966,14 +14584,14 @@
       </p:sp>
       <p:pic>
         <p:nvPicPr>
-          <p:cNvPr id="7" name="Image 0" descr="/home/claude/work/build/assets/fig_gantt.png">    </p:cNvPr>
+          <p:cNvPr id="7" name="Image 0" descr="/home/claude/work/build/assets/fig_gantt.png"/>
           <p:cNvPicPr>
             <a:picLocks noChangeAspect="1"/>
           </p:cNvPicPr>
           <p:nvPr/>
         </p:nvPicPr>
         <p:blipFill>
-          <a:blip r:embed="rId1"/>
+          <a:blip r:embed="rId3"/>
           <a:stretch>
             <a:fillRect/>
           </a:stretch>
@@ -14009,7 +14627,7 @@
           <a:bodyPr wrap="square" rtlCol="0" anchor="ctr"/>
           <a:lstStyle/>
           <a:p>
-            <a:pPr algn="ctr" indent="0" marL="0">
+            <a:pPr marL="0" indent="0" algn="ctr">
               <a:buNone/>
             </a:pPr>
             <a:r>
@@ -14328,4 +14946,319 @@
     </a:ext>
   </a:extLst>
 </a:theme>
+</file>
+
+<file path=ppt/theme/theme2.xml><?xml version="1.0" encoding="utf-8"?>
+<a:theme xmlns:a="http://schemas.openxmlformats.org/drawingml/2006/main" name="Office Theme">
+  <a:themeElements>
+    <a:clrScheme name="Office">
+      <a:dk1>
+        <a:sysClr val="windowText" lastClr="000000"/>
+      </a:dk1>
+      <a:lt1>
+        <a:sysClr val="window" lastClr="FFFFFF"/>
+      </a:lt1>
+      <a:dk2>
+        <a:srgbClr val="0E2841"/>
+      </a:dk2>
+      <a:lt2>
+        <a:srgbClr val="E8E8E8"/>
+      </a:lt2>
+      <a:accent1>
+        <a:srgbClr val="156082"/>
+      </a:accent1>
+      <a:accent2>
+        <a:srgbClr val="E97132"/>
+      </a:accent2>
+      <a:accent3>
+        <a:srgbClr val="196B24"/>
+      </a:accent3>
+      <a:accent4>
+        <a:srgbClr val="0F9ED5"/>
+      </a:accent4>
+      <a:accent5>
+        <a:srgbClr val="A02B93"/>
+      </a:accent5>
+      <a:accent6>
+        <a:srgbClr val="4EA72E"/>
+      </a:accent6>
+      <a:hlink>
+        <a:srgbClr val="467886"/>
+      </a:hlink>
+      <a:folHlink>
+        <a:srgbClr val="96607D"/>
+      </a:folHlink>
+    </a:clrScheme>
+    <a:fontScheme name="Office">
+      <a:majorFont>
+        <a:latin typeface="Aptos Display" panose="02110004020202020204"/>
+        <a:ea typeface=""/>
+        <a:cs typeface=""/>
+        <a:font script="Jpan" typeface="游ゴシック Light"/>
+        <a:font script="Hang" typeface="맑은 고딕"/>
+        <a:font script="Hans" typeface="等线 Light"/>
+        <a:font script="Hant" typeface="新細明體"/>
+        <a:font script="Arab" typeface="Times New Roman"/>
+        <a:font script="Hebr" typeface="Times New Roman"/>
+        <a:font script="Thai" typeface="Angsana New"/>
+        <a:font script="Ethi" typeface="Nyala"/>
+        <a:font script="Beng" typeface="Vrinda"/>
+        <a:font script="Gujr" typeface="Shruti"/>
+        <a:font script="Khmr" typeface="MoolBoran"/>
+        <a:font script="Knda" typeface="Tunga"/>
+        <a:font script="Guru" typeface="Raavi"/>
+        <a:font script="Cans" typeface="Euphemia"/>
+        <a:font script="Cher" typeface="Plantagenet Cherokee"/>
+        <a:font script="Yiii" typeface="Microsoft Yi Baiti"/>
+        <a:font script="Tibt" typeface="Microsoft Himalaya"/>
+        <a:font script="Thaa" typeface="MV Boli"/>
+        <a:font script="Deva" typeface="Mangal"/>
+        <a:font script="Telu" typeface="Gautami"/>
+        <a:font script="Taml" typeface="Latha"/>
+        <a:font script="Syrc" typeface="Estrangelo Edessa"/>
+        <a:font script="Orya" typeface="Kalinga"/>
+        <a:font script="Mlym" typeface="Kartika"/>
+        <a:font script="Laoo" typeface="DokChampa"/>
+        <a:font script="Sinh" typeface="Iskoola Pota"/>
+        <a:font script="Mong" typeface="Mongolian Baiti"/>
+        <a:font script="Viet" typeface="Times New Roman"/>
+        <a:font script="Uigh" typeface="Microsoft Uighur"/>
+        <a:font script="Geor" typeface="Sylfaen"/>
+        <a:font script="Armn" typeface="Arial"/>
+        <a:font script="Bugi" typeface="Leelawadee UI"/>
+        <a:font script="Bopo" typeface="Microsoft JhengHei"/>
+        <a:font script="Java" typeface="Javanese Text"/>
+        <a:font script="Lisu" typeface="Segoe UI"/>
+        <a:font script="Mymr" typeface="Myanmar Text"/>
+        <a:font script="Nkoo" typeface="Ebrima"/>
+        <a:font script="Olck" typeface="Nirmala UI"/>
+        <a:font script="Osma" typeface="Ebrima"/>
+        <a:font script="Phag" typeface="Phagspa"/>
+        <a:font script="Syrn" typeface="Estrangelo Edessa"/>
+        <a:font script="Syrj" typeface="Estrangelo Edessa"/>
+        <a:font script="Syre" typeface="Estrangelo Edessa"/>
+        <a:font script="Sora" typeface="Nirmala UI"/>
+        <a:font script="Tale" typeface="Microsoft Tai Le"/>
+        <a:font script="Talu" typeface="Microsoft New Tai Lue"/>
+        <a:font script="Tfng" typeface="Ebrima"/>
+      </a:majorFont>
+      <a:minorFont>
+        <a:latin typeface="Aptos" panose="02110004020202020204"/>
+        <a:ea typeface=""/>
+        <a:cs typeface=""/>
+        <a:font script="Jpan" typeface="游ゴシック"/>
+        <a:font script="Hang" typeface="맑은 고딕"/>
+        <a:font script="Hans" typeface="等线"/>
+        <a:font script="Hant" typeface="新細明體"/>
+        <a:font script="Arab" typeface="Arial"/>
+        <a:font script="Hebr" typeface="Arial"/>
+        <a:font script="Thai" typeface="Cordia New"/>
+        <a:font script="Ethi" typeface="Nyala"/>
+        <a:font script="Beng" typeface="Vrinda"/>
+        <a:font script="Gujr" typeface="Shruti"/>
+        <a:font script="Khmr" typeface="DaunPenh"/>
+        <a:font script="Knda" typeface="Tunga"/>
+        <a:font script="Guru" typeface="Raavi"/>
+        <a:font script="Cans" typeface="Euphemia"/>
+        <a:font script="Cher" typeface="Plantagenet Cherokee"/>
+        <a:font script="Yiii" typeface="Microsoft Yi Baiti"/>
+        <a:font script="Tibt" typeface="Microsoft Himalaya"/>
+        <a:font script="Thaa" typeface="MV Boli"/>
+        <a:font script="Deva" typeface="Mangal"/>
+        <a:font script="Telu" typeface="Gautami"/>
+        <a:font script="Taml" typeface="Latha"/>
+        <a:font script="Syrc" typeface="Estrangelo Edessa"/>
+        <a:font script="Orya" typeface="Kalinga"/>
+        <a:font script="Mlym" typeface="Kartika"/>
+        <a:font script="Laoo" typeface="DokChampa"/>
+        <a:font script="Sinh" typeface="Iskoola Pota"/>
+        <a:font script="Mong" typeface="Mongolian Baiti"/>
+        <a:font script="Viet" typeface="Arial"/>
+        <a:font script="Uigh" typeface="Microsoft Uighur"/>
+        <a:font script="Geor" typeface="Sylfaen"/>
+        <a:font script="Armn" typeface="Arial"/>
+        <a:font script="Bugi" typeface="Leelawadee UI"/>
+        <a:font script="Bopo" typeface="Microsoft JhengHei"/>
+        <a:font script="Java" typeface="Javanese Text"/>
+        <a:font script="Lisu" typeface="Segoe UI"/>
+        <a:font script="Mymr" typeface="Myanmar Text"/>
+        <a:font script="Nkoo" typeface="Ebrima"/>
+        <a:font script="Olck" typeface="Nirmala UI"/>
+        <a:font script="Osma" typeface="Ebrima"/>
+        <a:font script="Phag" typeface="Phagspa"/>
+        <a:font script="Syrn" typeface="Estrangelo Edessa"/>
+        <a:font script="Syrj" typeface="Estrangelo Edessa"/>
+        <a:font script="Syre" typeface="Estrangelo Edessa"/>
+        <a:font script="Sora" typeface="Nirmala UI"/>
+        <a:font script="Tale" typeface="Microsoft Tai Le"/>
+        <a:font script="Talu" typeface="Microsoft New Tai Lue"/>
+        <a:font script="Tfng" typeface="Ebrima"/>
+      </a:minorFont>
+    </a:fontScheme>
+    <a:fmtScheme name="Office">
+      <a:fillStyleLst>
+        <a:solidFill>
+          <a:schemeClr val="phClr"/>
+        </a:solidFill>
+        <a:gradFill rotWithShape="1">
+          <a:gsLst>
+            <a:gs pos="0">
+              <a:schemeClr val="phClr">
+                <a:lumMod val="110000"/>
+                <a:satMod val="105000"/>
+                <a:tint val="67000"/>
+              </a:schemeClr>
+            </a:gs>
+            <a:gs pos="50000">
+              <a:schemeClr val="phClr">
+                <a:lumMod val="105000"/>
+                <a:satMod val="103000"/>
+                <a:tint val="73000"/>
+              </a:schemeClr>
+            </a:gs>
+            <a:gs pos="100000">
+              <a:schemeClr val="phClr">
+                <a:lumMod val="105000"/>
+                <a:satMod val="109000"/>
+                <a:tint val="81000"/>
+              </a:schemeClr>
+            </a:gs>
+          </a:gsLst>
+          <a:lin ang="5400000" scaled="0"/>
+        </a:gradFill>
+        <a:gradFill rotWithShape="1">
+          <a:gsLst>
+            <a:gs pos="0">
+              <a:schemeClr val="phClr">
+                <a:satMod val="103000"/>
+                <a:lumMod val="102000"/>
+                <a:tint val="94000"/>
+              </a:schemeClr>
+            </a:gs>
+            <a:gs pos="50000">
+              <a:schemeClr val="phClr">
+                <a:satMod val="110000"/>
+                <a:lumMod val="100000"/>
+                <a:shade val="100000"/>
+              </a:schemeClr>
+            </a:gs>
+            <a:gs pos="100000">
+              <a:schemeClr val="phClr">
+                <a:lumMod val="99000"/>
+                <a:satMod val="120000"/>
+                <a:shade val="78000"/>
+              </a:schemeClr>
+            </a:gs>
+          </a:gsLst>
+          <a:lin ang="5400000" scaled="0"/>
+        </a:gradFill>
+      </a:fillStyleLst>
+      <a:lnStyleLst>
+        <a:ln w="12700" cap="flat" cmpd="sng" algn="ctr">
+          <a:solidFill>
+            <a:schemeClr val="phClr"/>
+          </a:solidFill>
+          <a:prstDash val="solid"/>
+          <a:miter lim="800000"/>
+        </a:ln>
+        <a:ln w="19050" cap="flat" cmpd="sng" algn="ctr">
+          <a:solidFill>
+            <a:schemeClr val="phClr"/>
+          </a:solidFill>
+          <a:prstDash val="solid"/>
+          <a:miter lim="800000"/>
+        </a:ln>
+        <a:ln w="25400" cap="flat" cmpd="sng" algn="ctr">
+          <a:solidFill>
+            <a:schemeClr val="phClr"/>
+          </a:solidFill>
+          <a:prstDash val="solid"/>
+          <a:miter lim="800000"/>
+        </a:ln>
+      </a:lnStyleLst>
+      <a:effectStyleLst>
+        <a:effectStyle>
+          <a:effectLst/>
+        </a:effectStyle>
+        <a:effectStyle>
+          <a:effectLst/>
+        </a:effectStyle>
+        <a:effectStyle>
+          <a:effectLst>
+            <a:outerShdw blurRad="57150" dist="19050" dir="5400000" algn="ctr" rotWithShape="0">
+              <a:srgbClr val="000000">
+                <a:alpha val="63000"/>
+              </a:srgbClr>
+            </a:outerShdw>
+          </a:effectLst>
+        </a:effectStyle>
+      </a:effectStyleLst>
+      <a:bgFillStyleLst>
+        <a:solidFill>
+          <a:schemeClr val="phClr"/>
+        </a:solidFill>
+        <a:solidFill>
+          <a:schemeClr val="phClr">
+            <a:tint val="95000"/>
+            <a:satMod val="170000"/>
+          </a:schemeClr>
+        </a:solidFill>
+        <a:gradFill rotWithShape="1">
+          <a:gsLst>
+            <a:gs pos="0">
+              <a:schemeClr val="phClr">
+                <a:tint val="93000"/>
+                <a:satMod val="150000"/>
+                <a:shade val="98000"/>
+                <a:lumMod val="102000"/>
+              </a:schemeClr>
+            </a:gs>
+            <a:gs pos="50000">
+              <a:schemeClr val="phClr">
+                <a:tint val="98000"/>
+                <a:satMod val="130000"/>
+                <a:shade val="90000"/>
+                <a:lumMod val="103000"/>
+              </a:schemeClr>
+            </a:gs>
+            <a:gs pos="100000">
+              <a:schemeClr val="phClr">
+                <a:shade val="63000"/>
+                <a:satMod val="120000"/>
+              </a:schemeClr>
+            </a:gs>
+          </a:gsLst>
+          <a:lin ang="5400000" scaled="0"/>
+        </a:gradFill>
+      </a:bgFillStyleLst>
+    </a:fmtScheme>
+  </a:themeElements>
+  <a:objectDefaults>
+    <a:lnDef>
+      <a:spPr/>
+      <a:bodyPr/>
+      <a:lstStyle/>
+      <a:style>
+        <a:lnRef idx="2">
+          <a:schemeClr val="accent1"/>
+        </a:lnRef>
+        <a:fillRef idx="0">
+          <a:schemeClr val="accent1"/>
+        </a:fillRef>
+        <a:effectRef idx="1">
+          <a:schemeClr val="accent1"/>
+        </a:effectRef>
+        <a:fontRef idx="minor">
+          <a:schemeClr val="tx1"/>
+        </a:fontRef>
+      </a:style>
+    </a:lnDef>
+  </a:objectDefaults>
+  <a:extraClrSchemeLst/>
+  <a:extLst>
+    <a:ext uri="{05A4C25C-085E-4340-85A3-A5531E510DB2}">
+      <thm15:themeFamily xmlns:thm15="http://schemas.microsoft.com/office/thememl/2012/main" name="Office Theme" id="{2E142A2C-CD16-42D6-873A-C26D2A0506FA}" vid="{1BDDFF52-6CD6-40A5-AB3C-68EB2F1E4D0A}"/>
+    </a:ext>
+  </a:extLst>
+</a:theme>
 </file>